--- a/it/slides/23-Architettura_dei_Calcolatori-Verm1_sul_Cartridge_Store-Codice.pptx
+++ b/it/slides/23-Architettura_dei_Calcolatori-Verm1_sul_Cartridge_Store-Codice.pptx
@@ -123,26 +123,42 @@
   <p:extLst>
     <p:ext uri="{521415D9-36F7-43E2-AB2F-B90AF26B5E84}">
       <p14:sectionLst xmlns:p14="http://schemas.microsoft.com/office/powerpoint/2010/main">
-        <p14:section name="Apertura" id="{3473cd88-32a6-a9eb-7123-6c791b4b5ee5}">
+        <p14:section name="Apertura" id="{d4b5f427-e2f2-d485-84c3-5642970f1b54}">
           <p14:sldIdLst>
             <p14:sldId id="256"/>
             <p14:sldId id="257"/>
           </p14:sldIdLst>
         </p14:section>
-        <p14:section name="I listati" id="{38f8b739-b8d0-df97-7251-947e04ad2eba}">
+        <p14:section name="Passo 1: un sorgente, due cartucce" id="{a7dfdbf3-e10a-f5c7-7734-1b7ee4066cfd}">
           <p14:sldIdLst>
             <p14:sldId id="258"/>
             <p14:sldId id="259"/>
+          </p14:sldIdLst>
+        </p14:section>
+        <p14:section name="Passo 2: un'identità" id="{ac93929b-8f99-3383-b70f-82cf9e8abbfb}">
+          <p14:sldIdLst>
             <p14:sldId id="260"/>
             <p14:sldId id="261"/>
+          </p14:sldIdLst>
+        </p14:section>
+        <p14:section name="Passo 3: la cartuccia porta con sé i documenti" id="{405adad0-7420-a00f-110e-1138ff75b1f6}">
+          <p14:sldIdLst>
             <p14:sldId id="262"/>
             <p14:sldId id="263"/>
+          </p14:sldIdLst>
+        </p14:section>
+        <p14:section name="Passo 4: il bundle" id="{458809d0-7f93-ae6f-3fb4-2690d8df793e}">
+          <p14:sldIdLst>
             <p14:sldId id="264"/>
             <p14:sldId id="265"/>
+          </p14:sldIdLst>
+        </p14:section>
+        <p14:section name="Passo 5: la pubblicazione" id="{0b6b6d6d-6ec5-d361-0ee7-3b3f3ae2e418}">
+          <p14:sldIdLst>
             <p14:sldId id="266"/>
           </p14:sldIdLst>
         </p14:section>
-        <p14:section name="Eseguire e provare" id="{419014e2-e3c2-3095-6031-09915e3fa45b}">
+        <p14:section name="Eseguire e provare" id="{2927d158-a354-a140-3de7-458f5a77cd86}">
           <p14:sldIdLst>
             <p14:sldId id="267"/>
             <p14:sldId id="268"/>
@@ -151,7 +167,7 @@
             <p14:sldId id="271"/>
           </p14:sldIdLst>
         </p14:section>
-        <p14:section name="Esercizi" id="{b3190794-a254-263b-1dc6-844da4c6b4e6}">
+        <p14:section name="Esercizi" id="{1315150e-31e2-4bc1-660d-870670ce1aea}">
           <p14:sldIdLst>
             <p14:sldId id="272"/>
           </p14:sldIdLst>
@@ -2997,7 +3013,63 @@
       </p:sp>
       <p:sp>
         <p:nvSpPr>
-          <p:cNvPr id="12" name="Shape 10"/>
+          <p:cNvPr id="12" name="Text 10"/>
+          <p:cNvSpPr txBox="1"/>
+          <p:nvPr/>
+        </p:nvSpPr>
+        <p:spPr>
+          <a:xfrm>
+            <a:off x="4693615" y="566928"/>
+            <a:ext cx="6949440" cy="640080"/>
+          </a:xfrm>
+          <a:prstGeom prst="rect">
+            <a:avLst/>
+          </a:prstGeom>
+          <a:noFill/>
+          <a:ln/>
+        </p:spPr>
+        <p:txBody>
+          <a:bodyPr wrap="square" lIns="0" tIns="0" rIns="0" bIns="0" rtlCol="0" anchor="t"/>
+          <a:lstStyle/>
+          <a:p>
+            <a:pPr algn="r" indent="0" marL="0">
+              <a:buNone/>
+            </a:pPr>
+            <a:r>
+              <a:rPr lang="en-US" sz="1300" dirty="0">
+                <a:solidFill>
+                  <a:srgbClr val="CFE3EA"/>
+                </a:solidFill>
+                <a:latin typeface="Calibri" pitchFamily="34" charset="0"/>
+                <a:ea typeface="Calibri" pitchFamily="34" charset="-122"/>
+                <a:cs typeface="Calibri" pitchFamily="34" charset="-120"/>
+              </a:rPr>
+              <a:t>Presentazione del codice. I concetti, le figure e le domande sono nella presentazione della lezione:</a:t>
+            </a:r>
+            <a:endParaRPr lang="en-US" sz="1300" dirty="0"/>
+          </a:p>
+          <a:p>
+            <a:pPr algn="r" indent="0" marL="0">
+              <a:buNone/>
+            </a:pPr>
+            <a:r>
+              <a:rPr lang="en-US" sz="1300" dirty="0">
+                <a:solidFill>
+                  <a:srgbClr val="CFE3EA"/>
+                </a:solidFill>
+                <a:latin typeface="Calibri" pitchFamily="34" charset="0"/>
+                <a:ea typeface="Calibri" pitchFamily="34" charset="-122"/>
+                <a:cs typeface="Calibri" pitchFamily="34" charset="-120"/>
+              </a:rPr>
+              <a:t>23-Architettura_dei_Calcolatori-Verm1_sul_Cartridge_Store.pptx</a:t>
+            </a:r>
+            <a:endParaRPr lang="en-US" sz="1300" dirty="0"/>
+          </a:p>
+        </p:txBody>
+      </p:sp>
+      <p:sp>
+        <p:nvSpPr>
+          <p:cNvPr id="13" name="Shape 11"/>
           <p:cNvSpPr/>
           <p:nvPr/>
         </p:nvSpPr>
@@ -3024,7 +3096,7 @@
       </p:sp>
       <p:pic>
         <p:nvPicPr>
-          <p:cNvPr id="13" name="Image 0" descr="/Users/raffaelemontella/devel/riscv-prg32/computer-architecture-with-prg32/tools/assets/prg32qt_store.png">    </p:cNvPr>
+          <p:cNvPr id="14" name="Image 0" descr="/Users/raffaelemontella/devel/riscv-prg32/computer-architecture-with-prg32/tools/assets/prg32qt_store.png">    </p:cNvPr>
           <p:cNvPicPr>
             <a:picLocks noChangeAspect="1"/>
           </p:cNvPicPr>

--- a/it/slides/23-Architettura_dei_Calcolatori-Verm1_sul_Cartridge_Store-Codice.pptx
+++ b/it/slides/23-Architettura_dei_Calcolatori-Verm1_sul_Cartridge_Store-Codice.pptx
@@ -123,42 +123,42 @@
   <p:extLst>
     <p:ext uri="{521415D9-36F7-43E2-AB2F-B90AF26B5E84}">
       <p14:sectionLst xmlns:p14="http://schemas.microsoft.com/office/powerpoint/2010/main">
-        <p14:section name="Apertura" id="{d4b5f427-e2f2-d485-84c3-5642970f1b54}">
+        <p14:section name="Apertura" id="{5abf28a3-13e6-c843-42b1-c50f6e8dc918}">
           <p14:sldIdLst>
             <p14:sldId id="256"/>
             <p14:sldId id="257"/>
           </p14:sldIdLst>
         </p14:section>
-        <p14:section name="Passo 1: un sorgente, due cartucce" id="{a7dfdbf3-e10a-f5c7-7734-1b7ee4066cfd}">
+        <p14:section name="Passo 1: un sorgente, due cartucce" id="{6196a213-4e29-e120-d94d-e01b53386781}">
           <p14:sldIdLst>
             <p14:sldId id="258"/>
             <p14:sldId id="259"/>
           </p14:sldIdLst>
         </p14:section>
-        <p14:section name="Passo 2: un'identità" id="{ac93929b-8f99-3383-b70f-82cf9e8abbfb}">
+        <p14:section name="Passo 2: un'identità" id="{a43851c6-ee11-e09a-7a87-0b6e6bfd6a94}">
           <p14:sldIdLst>
             <p14:sldId id="260"/>
             <p14:sldId id="261"/>
           </p14:sldIdLst>
         </p14:section>
-        <p14:section name="Passo 3: la cartuccia porta con sé i documenti" id="{405adad0-7420-a00f-110e-1138ff75b1f6}">
+        <p14:section name="Passo 3: la cartuccia porta con sé i documenti" id="{e43036da-0007-9e10-2d4e-1235d887ba8d}">
           <p14:sldIdLst>
             <p14:sldId id="262"/>
             <p14:sldId id="263"/>
           </p14:sldIdLst>
         </p14:section>
-        <p14:section name="Passo 4: il bundle" id="{458809d0-7f93-ae6f-3fb4-2690d8df793e}">
+        <p14:section name="Passo 4: il bundle" id="{b6287d0d-6dbc-a3f2-d630-24e216e3810b}">
           <p14:sldIdLst>
             <p14:sldId id="264"/>
             <p14:sldId id="265"/>
           </p14:sldIdLst>
         </p14:section>
-        <p14:section name="Passo 5: la pubblicazione" id="{0b6b6d6d-6ec5-d361-0ee7-3b3f3ae2e418}">
+        <p14:section name="Passo 5: la pubblicazione" id="{f6d07e97-6e66-de17-eb88-1c99a3b97779}">
           <p14:sldIdLst>
             <p14:sldId id="266"/>
           </p14:sldIdLst>
         </p14:section>
-        <p14:section name="Eseguire e provare" id="{2927d158-a354-a140-3de7-458f5a77cd86}">
+        <p14:section name="Eseguire e provare" id="{f0ff681b-343e-f8be-9349-f69466963019}">
           <p14:sldIdLst>
             <p14:sldId id="267"/>
             <p14:sldId id="268"/>
@@ -167,7 +167,7 @@
             <p14:sldId id="271"/>
           </p14:sldIdLst>
         </p14:section>
-        <p14:section name="Esercizi" id="{1315150e-31e2-4bc1-660d-870670ce1aea}">
+        <p14:section name="Esercizi" id="{00a5bb8c-461d-3e27-78eb-c5fdabbcb5bc}">
           <p14:sldIdLst>
             <p14:sldId id="272"/>
           </p14:sldIdLst>
@@ -576,7 +576,9 @@
           <a:p>
             <a:r>
               <a:rPr lang="en-US" dirty="0"/>
-              <a:t>Questa è la presentazione del codice della Lezione 23. La presentazione della lezione contiene i concetti; questa contiene tutto ciò che si scrive e si esegue: i listati con la loro spiegazione, il programma completo, che cosa mostra, e il modo di provarlo su ciascuno dei tre host.</a:t>
+              <a:t>Questa è la presentazione del codice della Lezione 23. La presentazione della lezione contiene i concetti; questa contiene tutto ciò che si scrive e si esegue: i listati con la loro spiegazione, il programma completo, che cosa mostra, e il modo di provarlo su ciascuno dei tre host.
+Stato di apprendimento: DA COMPRENDERE OGGI, alla fine di questa lezione lo spiegate, lo seguite passo passo e lo applicate da soli; DA UTILIZZARE OGGI, oggi seguite e usate la ricetta; come funziona dentro si spiega più avanti, o non fa parte del corso; DA COMPRENDERE PIÙ AVANTI, riconoscete il nome e lo scopo; lo spiega una lezione successiva. Una slide senza etichetta è contesto: una storia, un esempio, una domanda, un esercizio.
+Stato di apprendimento di questa lezione. DA COMPRENDERE OGGI: impacchettare e pubblicare; la cartuccia portabile. DA UTILIZZARE OGGI: gli strumenti di PRG32 (si usa, non si studia, in questo corso). DA COMPRENDERE PIÙ AVANTI: niente. Una slide senza etichetta è contesto: una storia, un esempio, una domanda, un esercizio.</a:t>
             </a:r>
             <a:endParaRPr lang="en-US" dirty="0"/>
           </a:p>
@@ -754,6 +756,7 @@
             <a:r>
               <a:rPr lang="en-US" dirty="0"/>
               <a:t>Tre azioni. Accedete allo Store e create un token. Tenetelo in una variabile d'ambiente della vostra shell. Poi inviate il bundle con store publish-bundle. Il token siete voi: chi lo possiede pubblica a vostro nome. Quindi è un segreto: non va nel sorgente, né in un file sotto controllo di versione, né in una schermata. Se lo perdete o lo mostrate per errore, revocatelo e createne uno nuovo.
+DA COMPRENDERE OGGI: impacchettare e pubblicare.
 Per il docente: È l'unico passo che non è stato eseguito per queste slide: richiede un account personale. Fatelo dal vivo con un volontario, con il token del volontario, e non proiettate mai il token.</a:t>
             </a:r>
             <a:endParaRPr lang="en-US" dirty="0"/>
@@ -932,6 +935,7 @@
             <a:r>
               <a:rPr lang="en-US" dirty="0"/>
               <a:t>La via più rapida: PRG32-QT sul vostro computer. Quattro passi, ciascuno con il suo comando. PRG32-QT si comporta come una scheda sulla porta 8080, ed è per questo che il comando di caricamento dice esp32c6. Con la modalità debug abilitata potete fermarvi su qualsiasi istruzione e leggere registri e memoria.
+DA UTILIZZARE OGGI: gli strumenti di PRG32 (si usa, non si studia, in questo corso).
 Per il docente: Eseguito dai test: la cartuccia di questa slide è compilata con questo comando ed eseguita sull'esecutore senza interfaccia di PRG32-QT. Senza la toolchain: importate il file .prg32 in PRG32-QT e scegliete Run Cartridge. Tasti: frecce o WASD per il joystick, Z o J per A, X o K per B, Invio per Start, Esc per tornare a Setup.</a:t>
             </a:r>
             <a:endParaRPr lang="en-US" dirty="0"/>
@@ -1021,6 +1025,7 @@
             <a:r>
               <a:rPr lang="en-US" dirty="0"/>
               <a:t>Lo stesso programma sull'emulatore. QEMU esegue il firmware vero su un chip emulato, quindi la cartuccia va compilata per l'architettura qemu. Caricate la cartuccia mentre QEMU è chiuso. Il firmware si apre sul menu Setup: scegliete Run Cartridge e lo slot. Ricordate che la tastiera è letta dal terminale, non dalla finestra con l'immagine.
+DA UTILIZZARE OGGI: gli strumenti di PRG32 (si usa, non si studia, in questo corso).
 Per il docente: Verificato dai test fino al caricamento: la cartuccia è compilata per l'architettura qemu e accettata nell'immagine flash dell'emulatore. Ciò che l'emulatore poi mostra non è verificato automaticamente: il QEMU di Espressif ha bisogno della sua finestra. Dall'ottobre 2026 il firmware parte da Setup: scegliete Run Cartridge, poi cart0.</a:t>
             </a:r>
             <a:endParaRPr lang="en-US" dirty="0"/>
@@ -1110,6 +1115,7 @@
             <a:r>
               <a:rPr lang="en-US" dirty="0"/>
               <a:t>Lo stesso programma sul kit. Il firmware si scrive una volta, via USB; dopo, le cartucce viaggiano sul Wi-Fi. Il comando di caricamento è quello usato per PRG32-QT con l'indirizzo della scheda. È l'unico host che i test automatici non eseguono: provatelo, e riferite ciò che vedete.
+DA UTILIZZARE OGGI: gli strumenti di PRG32 (si usa, non si studia, in questo corso).
 Per il docente: Non eseguito dai test: sulla macchina di prova non c'è una scheda. La cartuccia per l'architettura esp32c6 è compilata dai test; i passi sono quelli della documentazione di PRG32. Se la porta seriale non viene trovata, passatela esplicitamente. Per usare il Wi-Fi dell'aula: python3 -m prg32 wifi set --ssid NOME --password PASSWORD --mode sta.</a:t>
             </a:r>
             <a:endParaRPr lang="en-US" dirty="0"/>
@@ -1199,6 +1205,7 @@
             <a:r>
               <a:rPr lang="en-US" dirty="0"/>
               <a:t>I cinque sintomi più comuni, che cosa significa ciascuno, e che cosa fare. Leggete il messaggio prima di cambiare qualcosa: quasi sempre nomina la causa.
+DA UTILIZZARE OGGI: gli strumenti di PRG32 (si usa, non si studia, in questo corso).
 Per il docente: Le prime tre righe coprono la maggior parte dei casi. Quando chiedete aiuto, incollate il comando e l'intero messaggio come testo. docs/usage/troubleshooting.md del repository di PRG32 ha l'elenco completo.</a:t>
             </a:r>
             <a:endParaRPr lang="en-US" dirty="0"/>
@@ -1466,6 +1473,7 @@
             <a:r>
               <a:rPr lang="en-US" dirty="0"/>
               <a:t>Il comando di compilazione di ogni lezione, con un'opzione in più: --architecture indica il target per cui viene prodotto il file, prima esp32c6 e poi qemu. I file prodotti seguono una regola per i nomi: il nome del gioco, un trattino, l'architettura. Il sorgente è lo stesso per entrambi. Guardate la dimensione riportata dal builder: l'intero gioco finito è circa sei kilobyte di codice.
+DA COMPRENDERE OGGI: la cartuccia portabile. DA UTILIZZARE OGGI: gli strumenti di PRG32 (si usa, non si studia, in questo corso).
 Per il docente: Il builder risponde: built verm1-esp32c6.prg32 name=verm1 load=0x40800000, e code=6216 per il gioco di riferimento. Sei kilobyte: meno di questa slide come immagine.</a:t>
             </a:r>
             <a:endParaRPr lang="en-US" dirty="0"/>
@@ -1555,6 +1563,7 @@
             <a:r>
               <a:rPr lang="en-US" dirty="0"/>
               <a:t>cartridge summary stampa ciò che un file di cartuccia dichiara di sé. Cercate una riga: import_model deve valere abi-table. Significa che la cartuccia raggiunge le funzioni del runtime attraverso una tabella, e non attraverso gli indirizzi fissi di una particolare immagine del firmware. Una cartuccia così è portabile: continua a funzionare quando il firmware viene aggiornato. Lo Store accetta cartucce portabili. Ripetete il controllo sul secondo file.
+DA COMPRENDERE OGGI: la cartuccia portabile.
 Per il docente: Una cartuccia non portabile è collegata agli indirizzi di una specifica immagine del firmware e si rompe al primo aggiornamento. La tabella è l'ABI di PRG32: prg32_gfx_rect e le altre ne sono voci. Ripetete il controllo sul file per QEMU.</a:t>
             </a:r>
             <a:endParaRPr lang="en-US" dirty="0"/>
@@ -1644,6 +1653,7 @@
             <a:r>
               <a:rPr lang="en-US" dirty="0"/>
               <a:t>Il manifest è un file JSON che descrive il gioco. Leggete i campi uno per uno. id è un nome unico al mondo. version sono tre numeri. title è ciò che legge il giocatore. summary è una riga per lo scaffale e description un paragrafo. Poi autori, licenza ed etichette. Alla fine, assets nomina l'icona e architectures dice quale file di cartuccia serve quale target. Createlo con un editor di testo nella cartella del vostro gioco.
+DA COMPRENDERE OGGI: impacchettare e pubblicare.
 Per il docente: Create il file in ~/verm1 con un editor di testo. Nella slide la descrizione è tagliata. La riga abi dice di quale versione del formato dei metadati si tratta.</a:t>
             </a:r>
             <a:endParaRPr lang="en-US" dirty="0"/>
@@ -1733,6 +1743,7 @@
             <a:r>
               <a:rPr lang="en-US" dirty="0"/>
               <a:t>Il colophon è la pagina dei crediti della cartuccia; la parola viene dalla tipografia, dove indica la nota in fondo a un libro che dice chi l'ha realizzato. Elenca ruoli e nomi, i comandi, cioè che cosa fa ogni ingresso per il giocatore, e i ringraziamenti, dove resta citato il gioco di riferimento da cui siete partiti. Sostituite ovunque il nome segnaposto e impostate la data.
+DA COMPRENDERE OGGI: impacchettare e pubblicare.
 Per il docente: Colophon è la parola dei tipografi per la nota in fondo a un libro che dice chi l'ha realizzato. Sostituite ovunque Your Name, e impostate la data di pubblicazione.</a:t>
             </a:r>
             <a:endParaRPr lang="en-US" dirty="0"/>
@@ -1822,6 +1833,7 @@
             <a:r>
               <a:rPr lang="en-US" dirty="0"/>
               <a:t>Prima preparate metadata.json: una copia del manifest senza le due voci assets e architectures, che riguardano il bundle e non la singola cartuccia. Poi store attach-metadata scrive metadati, icona e colophon dentro la cartuccia: una volta per file, ciascuno con la sua architettura. Il programma non viene toccato; le informazioni vengono aggiunte in coda. Da questo momento una cartuccia copiata a mano dice ancora che cos'è e chi l'ha fatta.
+DA COMPRENDERE OGGI: la cartuccia portabile.
 Per il docente: Lo strumento risponde: wrote verm1-esp32c6.prg32 legacy=6316 blocks=3. I tre blocchi sono i metadati, l'icona e il colophon, aggiunti in coda al programma; il programma in sé non viene toccato. Attenzione: dare il manifest completo a --metadata fa fallire lo strumento, per via della voce assets.</a:t>
             </a:r>
             <a:endParaRPr lang="en-US" dirty="0"/>
@@ -1911,6 +1923,7 @@
             <a:r>
               <a:rPr lang="en-US" dirty="0"/>
               <a:t>Mai fidarsi di una scrittura che non si è riletta. store inspect-metadata stampa ciò che c'è dentro la cartuccia: controllate id, titolo, versione e architettura, e che trailer_present valga true. Poi eseguite ancora una volta la cartuccia: deve funzionare esattamente come prima. Rileggere ciò che si è scritto è l'abitudine di tutto il corso, dalla vista della memoria nel debugger a questo comando.
+DA COMPRENDERE OGGI: la cartuccia portabile.
 Per il docente: Output abbreviato. Rileggere ciò che si è scritto è l'abitudine di tutto il corso: la vista della memoria nel debugger, e ora questo.</a:t>
             </a:r>
             <a:endParaRPr lang="en-US" dirty="0"/>
@@ -2000,6 +2013,7 @@
             <a:r>
               <a:rPr lang="en-US" dirty="0"/>
               <a:t>store pack-bundle legge il manifest, raccoglie i file che nomina e produce un file ZIP il cui nome porta la versione. Se un file manca o ha il nome sbagliato, lo strumento si ferma qui, sul vostro calcolatore, e non più tardi allo Store. Guardate l'elenco che stampa: il manifest, l'icona e le due cartucce. Il vostro intero gioco, per due macchine, è circa sedici kilobyte.
+DA COMPRENDERE OGGI: impacchettare e pubblicare.
 Per il docente: Output reale per il gioco di riferimento, da tools/tests/verm1_store.py. I file devono stare nella stessa cartella del manifest.</a:t>
             </a:r>
             <a:endParaRPr lang="en-US" dirty="0"/>
@@ -3120,6 +3134,420 @@
       </p:pic>
       <p:sp>
         <p:nvSpPr>
+          <p:cNvPr id="15" name="Shape 12"/>
+          <p:cNvSpPr/>
+          <p:nvPr/>
+        </p:nvSpPr>
+        <p:spPr>
+          <a:xfrm>
+            <a:off x="8910777" y="91440"/>
+            <a:ext cx="2732278" cy="274320"/>
+          </a:xfrm>
+          <a:prstGeom prst="rect">
+            <a:avLst/>
+          </a:prstGeom>
+          <a:solidFill>
+            <a:srgbClr val="F3E8FF"/>
+          </a:solidFill>
+          <a:ln w="12700">
+            <a:solidFill>
+              <a:srgbClr val="7E22CE"/>
+            </a:solidFill>
+            <a:prstDash val="dash"/>
+          </a:ln>
+        </p:spPr>
+      </p:sp>
+      <p:sp>
+        <p:nvSpPr>
+          <p:cNvPr id="16" name="Shape 13"/>
+          <p:cNvSpPr/>
+          <p:nvPr/>
+        </p:nvSpPr>
+        <p:spPr>
+          <a:xfrm>
+            <a:off x="8938209" y="128016"/>
+            <a:ext cx="45720" cy="45720"/>
+          </a:xfrm>
+          <a:prstGeom prst="rect">
+            <a:avLst/>
+          </a:prstGeom>
+          <a:solidFill>
+            <a:srgbClr val="7E22CE"/>
+          </a:solidFill>
+          <a:ln w="12700">
+            <a:solidFill>
+              <a:srgbClr val="7E22CE"/>
+            </a:solidFill>
+            <a:prstDash val="solid"/>
+          </a:ln>
+        </p:spPr>
+      </p:sp>
+      <p:sp>
+        <p:nvSpPr>
+          <p:cNvPr id="17" name="Shape 14"/>
+          <p:cNvSpPr/>
+          <p:nvPr/>
+        </p:nvSpPr>
+        <p:spPr>
+          <a:xfrm>
+            <a:off x="8938209" y="205740"/>
+            <a:ext cx="45720" cy="45720"/>
+          </a:xfrm>
+          <a:prstGeom prst="rect">
+            <a:avLst/>
+          </a:prstGeom>
+          <a:solidFill>
+            <a:srgbClr val="7E22CE"/>
+          </a:solidFill>
+          <a:ln w="12700">
+            <a:solidFill>
+              <a:srgbClr val="7E22CE"/>
+            </a:solidFill>
+            <a:prstDash val="solid"/>
+          </a:ln>
+        </p:spPr>
+      </p:sp>
+      <p:sp>
+        <p:nvSpPr>
+          <p:cNvPr id="18" name="Shape 15"/>
+          <p:cNvSpPr/>
+          <p:nvPr/>
+        </p:nvSpPr>
+        <p:spPr>
+          <a:xfrm>
+            <a:off x="8938209" y="283464"/>
+            <a:ext cx="45720" cy="45720"/>
+          </a:xfrm>
+          <a:prstGeom prst="rect">
+            <a:avLst/>
+          </a:prstGeom>
+          <a:solidFill>
+            <a:srgbClr val="7E22CE"/>
+          </a:solidFill>
+          <a:ln w="12700">
+            <a:solidFill>
+              <a:srgbClr val="7E22CE"/>
+            </a:solidFill>
+            <a:prstDash val="solid"/>
+          </a:ln>
+        </p:spPr>
+      </p:sp>
+      <p:pic>
+        <p:nvPicPr>
+          <p:cNvPr id="19" name="Image 1" descr="preencoded.png">    </p:cNvPr>
+          <p:cNvPicPr>
+            <a:picLocks noChangeAspect="1"/>
+          </p:cNvPicPr>
+          <p:nvPr/>
+        </p:nvPicPr>
+        <p:blipFill>
+          <a:blip r:embed="rId2"/>
+          <a:stretch>
+            <a:fillRect/>
+          </a:stretch>
+        </p:blipFill>
+        <p:spPr>
+          <a:xfrm>
+            <a:off x="9038793" y="128016"/>
+            <a:ext cx="201168" cy="201168"/>
+          </a:xfrm>
+          <a:prstGeom prst="rect">
+            <a:avLst/>
+          </a:prstGeom>
+        </p:spPr>
+      </p:pic>
+      <p:sp>
+        <p:nvSpPr>
+          <p:cNvPr id="20" name="Text 16"/>
+          <p:cNvSpPr txBox="1"/>
+          <p:nvPr/>
+        </p:nvSpPr>
+        <p:spPr>
+          <a:xfrm>
+            <a:off x="9294825" y="91440"/>
+            <a:ext cx="2311654" cy="274320"/>
+          </a:xfrm>
+          <a:prstGeom prst="rect">
+            <a:avLst/>
+          </a:prstGeom>
+          <a:noFill/>
+          <a:ln/>
+        </p:spPr>
+        <p:txBody>
+          <a:bodyPr wrap="square" lIns="0" tIns="0" rIns="0" bIns="0" rtlCol="0" anchor="ctr"/>
+          <a:lstStyle/>
+          <a:p>
+            <a:pPr indent="0" marL="0">
+              <a:buNone/>
+            </a:pPr>
+            <a:r>
+              <a:rPr lang="en-US" sz="1100" b="1" dirty="0">
+                <a:solidFill>
+                  <a:srgbClr val="6B21A8"/>
+                </a:solidFill>
+                <a:latin typeface="Calibri" pitchFamily="34" charset="0"/>
+                <a:ea typeface="Calibri" pitchFamily="34" charset="-122"/>
+                <a:cs typeface="Calibri" pitchFamily="34" charset="-120"/>
+              </a:rPr>
+              <a:t>DA COMPRENDERE PIÙ AVANTI</a:t>
+            </a:r>
+            <a:endParaRPr lang="en-US" sz="1100" dirty="0"/>
+          </a:p>
+        </p:txBody>
+      </p:sp>
+      <p:sp>
+        <p:nvSpPr>
+          <p:cNvPr id="21" name="Shape 17"/>
+          <p:cNvSpPr/>
+          <p:nvPr/>
+        </p:nvSpPr>
+        <p:spPr>
+          <a:xfrm>
+            <a:off x="6675069" y="91440"/>
+            <a:ext cx="2125980" cy="274320"/>
+          </a:xfrm>
+          <a:prstGeom prst="rect">
+            <a:avLst/>
+          </a:prstGeom>
+          <a:solidFill>
+            <a:srgbClr val="FEF3C7"/>
+          </a:solidFill>
+          <a:ln w="12700">
+            <a:solidFill>
+              <a:srgbClr val="B45309"/>
+            </a:solidFill>
+            <a:prstDash val="solid"/>
+          </a:ln>
+        </p:spPr>
+      </p:sp>
+      <p:sp>
+        <p:nvSpPr>
+          <p:cNvPr id="22" name="Shape 18"/>
+          <p:cNvSpPr/>
+          <p:nvPr/>
+        </p:nvSpPr>
+        <p:spPr>
+          <a:xfrm>
+            <a:off x="6675069" y="91440"/>
+            <a:ext cx="27432" cy="274320"/>
+          </a:xfrm>
+          <a:prstGeom prst="rect">
+            <a:avLst/>
+          </a:prstGeom>
+          <a:solidFill>
+            <a:srgbClr val="B45309"/>
+          </a:solidFill>
+          <a:ln w="12700">
+            <a:solidFill>
+              <a:srgbClr val="B45309"/>
+            </a:solidFill>
+            <a:prstDash val="solid"/>
+          </a:ln>
+        </p:spPr>
+      </p:sp>
+      <p:sp>
+        <p:nvSpPr>
+          <p:cNvPr id="23" name="Shape 19"/>
+          <p:cNvSpPr/>
+          <p:nvPr/>
+        </p:nvSpPr>
+        <p:spPr>
+          <a:xfrm>
+            <a:off x="6729933" y="91440"/>
+            <a:ext cx="27432" cy="274320"/>
+          </a:xfrm>
+          <a:prstGeom prst="rect">
+            <a:avLst/>
+          </a:prstGeom>
+          <a:solidFill>
+            <a:srgbClr val="B45309"/>
+          </a:solidFill>
+          <a:ln w="12700">
+            <a:solidFill>
+              <a:srgbClr val="B45309"/>
+            </a:solidFill>
+            <a:prstDash val="solid"/>
+          </a:ln>
+        </p:spPr>
+      </p:sp>
+      <p:pic>
+        <p:nvPicPr>
+          <p:cNvPr id="24" name="Image 2" descr="preencoded.png">    </p:cNvPr>
+          <p:cNvPicPr>
+            <a:picLocks noChangeAspect="1"/>
+          </p:cNvPicPr>
+          <p:nvPr/>
+        </p:nvPicPr>
+        <p:blipFill>
+          <a:blip r:embed="rId3"/>
+          <a:stretch>
+            <a:fillRect/>
+          </a:stretch>
+        </p:blipFill>
+        <p:spPr>
+          <a:xfrm>
+            <a:off x="6803085" y="128016"/>
+            <a:ext cx="201168" cy="201168"/>
+          </a:xfrm>
+          <a:prstGeom prst="rect">
+            <a:avLst/>
+          </a:prstGeom>
+        </p:spPr>
+      </p:pic>
+      <p:sp>
+        <p:nvSpPr>
+          <p:cNvPr id="25" name="Text 20"/>
+          <p:cNvSpPr txBox="1"/>
+          <p:nvPr/>
+        </p:nvSpPr>
+        <p:spPr>
+          <a:xfrm>
+            <a:off x="7059117" y="91440"/>
+            <a:ext cx="1705356" cy="274320"/>
+          </a:xfrm>
+          <a:prstGeom prst="rect">
+            <a:avLst/>
+          </a:prstGeom>
+          <a:noFill/>
+          <a:ln/>
+        </p:spPr>
+        <p:txBody>
+          <a:bodyPr wrap="square" lIns="0" tIns="0" rIns="0" bIns="0" rtlCol="0" anchor="ctr"/>
+          <a:lstStyle/>
+          <a:p>
+            <a:pPr indent="0" marL="0">
+              <a:buNone/>
+            </a:pPr>
+            <a:r>
+              <a:rPr lang="en-US" sz="1100" b="1" dirty="0">
+                <a:solidFill>
+                  <a:srgbClr val="92400E"/>
+                </a:solidFill>
+                <a:latin typeface="Calibri" pitchFamily="34" charset="0"/>
+                <a:ea typeface="Calibri" pitchFamily="34" charset="-122"/>
+                <a:cs typeface="Calibri" pitchFamily="34" charset="-120"/>
+              </a:rPr>
+              <a:t>DA UTILIZZARE OGGI</a:t>
+            </a:r>
+            <a:endParaRPr lang="en-US" sz="1100" dirty="0"/>
+          </a:p>
+        </p:txBody>
+      </p:sp>
+      <p:sp>
+        <p:nvSpPr>
+          <p:cNvPr id="26" name="Shape 21"/>
+          <p:cNvSpPr/>
+          <p:nvPr/>
+        </p:nvSpPr>
+        <p:spPr>
+          <a:xfrm>
+            <a:off x="4352747" y="91440"/>
+            <a:ext cx="2212594" cy="274320"/>
+          </a:xfrm>
+          <a:prstGeom prst="rect">
+            <a:avLst/>
+          </a:prstGeom>
+          <a:solidFill>
+            <a:srgbClr val="E0F2FE"/>
+          </a:solidFill>
+          <a:ln w="12700">
+            <a:solidFill>
+              <a:srgbClr val="0369A1"/>
+            </a:solidFill>
+            <a:prstDash val="solid"/>
+          </a:ln>
+        </p:spPr>
+      </p:sp>
+      <p:sp>
+        <p:nvSpPr>
+          <p:cNvPr id="27" name="Shape 22"/>
+          <p:cNvSpPr/>
+          <p:nvPr/>
+        </p:nvSpPr>
+        <p:spPr>
+          <a:xfrm>
+            <a:off x="4352747" y="91440"/>
+            <a:ext cx="73152" cy="274320"/>
+          </a:xfrm>
+          <a:prstGeom prst="rect">
+            <a:avLst/>
+          </a:prstGeom>
+          <a:solidFill>
+            <a:srgbClr val="0369A1"/>
+          </a:solidFill>
+          <a:ln w="12700">
+            <a:solidFill>
+              <a:srgbClr val="0369A1"/>
+            </a:solidFill>
+            <a:prstDash val="solid"/>
+          </a:ln>
+        </p:spPr>
+      </p:sp>
+      <p:pic>
+        <p:nvPicPr>
+          <p:cNvPr id="28" name="Image 3" descr="preencoded.png">    </p:cNvPr>
+          <p:cNvPicPr>
+            <a:picLocks noChangeAspect="1"/>
+          </p:cNvPicPr>
+          <p:nvPr/>
+        </p:nvPicPr>
+        <p:blipFill>
+          <a:blip r:embed="rId4"/>
+          <a:stretch>
+            <a:fillRect/>
+          </a:stretch>
+        </p:blipFill>
+        <p:spPr>
+          <a:xfrm>
+            <a:off x="4480763" y="128016"/>
+            <a:ext cx="201168" cy="201168"/>
+          </a:xfrm>
+          <a:prstGeom prst="rect">
+            <a:avLst/>
+          </a:prstGeom>
+        </p:spPr>
+      </p:pic>
+      <p:sp>
+        <p:nvSpPr>
+          <p:cNvPr id="29" name="Text 23"/>
+          <p:cNvSpPr txBox="1"/>
+          <p:nvPr/>
+        </p:nvSpPr>
+        <p:spPr>
+          <a:xfrm>
+            <a:off x="4736795" y="91440"/>
+            <a:ext cx="1791970" cy="274320"/>
+          </a:xfrm>
+          <a:prstGeom prst="rect">
+            <a:avLst/>
+          </a:prstGeom>
+          <a:noFill/>
+          <a:ln/>
+        </p:spPr>
+        <p:txBody>
+          <a:bodyPr wrap="square" lIns="0" tIns="0" rIns="0" bIns="0" rtlCol="0" anchor="ctr"/>
+          <a:lstStyle/>
+          <a:p>
+            <a:pPr indent="0" marL="0">
+              <a:buNone/>
+            </a:pPr>
+            <a:r>
+              <a:rPr lang="en-US" sz="1100" b="1" dirty="0">
+                <a:solidFill>
+                  <a:srgbClr val="075985"/>
+                </a:solidFill>
+                <a:latin typeface="Calibri" pitchFamily="34" charset="0"/>
+                <a:ea typeface="Calibri" pitchFamily="34" charset="-122"/>
+                <a:cs typeface="Calibri" pitchFamily="34" charset="-120"/>
+              </a:rPr>
+              <a:t>DA COMPRENDERE OGGI</a:t>
+            </a:r>
+            <a:endParaRPr lang="en-US" sz="1100" dirty="0"/>
+          </a:p>
+        </p:txBody>
+      </p:sp>
+      <p:sp>
+        <p:nvSpPr>
           <p:cNvPr id="25" name="Slide Number Placeholder 0"/>
           <p:cNvSpPr>
             <a:spLocks noGrp="1"/>
@@ -4582,6 +5010,133 @@
       </p:sp>
       <p:sp>
         <p:nvSpPr>
+          <p:cNvPr id="17" name="Shape 15"/>
+          <p:cNvSpPr/>
+          <p:nvPr/>
+        </p:nvSpPr>
+        <p:spPr>
+          <a:xfrm>
+            <a:off x="7526350" y="91440"/>
+            <a:ext cx="4116705" cy="274320"/>
+          </a:xfrm>
+          <a:prstGeom prst="rect">
+            <a:avLst/>
+          </a:prstGeom>
+          <a:solidFill>
+            <a:srgbClr val="E0F2FE"/>
+          </a:solidFill>
+          <a:ln w="12700">
+            <a:solidFill>
+              <a:srgbClr val="0369A1"/>
+            </a:solidFill>
+            <a:prstDash val="solid"/>
+          </a:ln>
+        </p:spPr>
+      </p:sp>
+      <p:sp>
+        <p:nvSpPr>
+          <p:cNvPr id="18" name="Shape 16"/>
+          <p:cNvSpPr/>
+          <p:nvPr/>
+        </p:nvSpPr>
+        <p:spPr>
+          <a:xfrm>
+            <a:off x="7526350" y="91440"/>
+            <a:ext cx="73152" cy="274320"/>
+          </a:xfrm>
+          <a:prstGeom prst="rect">
+            <a:avLst/>
+          </a:prstGeom>
+          <a:solidFill>
+            <a:srgbClr val="0369A1"/>
+          </a:solidFill>
+          <a:ln w="12700">
+            <a:solidFill>
+              <a:srgbClr val="0369A1"/>
+            </a:solidFill>
+            <a:prstDash val="solid"/>
+          </a:ln>
+        </p:spPr>
+      </p:sp>
+      <p:pic>
+        <p:nvPicPr>
+          <p:cNvPr id="19" name="Image 0" descr="preencoded.png">    </p:cNvPr>
+          <p:cNvPicPr>
+            <a:picLocks noChangeAspect="1"/>
+          </p:cNvPicPr>
+          <p:nvPr/>
+        </p:nvPicPr>
+        <p:blipFill>
+          <a:blip r:embed="rId1"/>
+          <a:stretch>
+            <a:fillRect/>
+          </a:stretch>
+        </p:blipFill>
+        <p:spPr>
+          <a:xfrm>
+            <a:off x="7654366" y="128016"/>
+            <a:ext cx="201168" cy="201168"/>
+          </a:xfrm>
+          <a:prstGeom prst="rect">
+            <a:avLst/>
+          </a:prstGeom>
+        </p:spPr>
+      </p:pic>
+      <p:sp>
+        <p:nvSpPr>
+          <p:cNvPr id="20" name="Text 17"/>
+          <p:cNvSpPr txBox="1"/>
+          <p:nvPr/>
+        </p:nvSpPr>
+        <p:spPr>
+          <a:xfrm>
+            <a:off x="7910398" y="91440"/>
+            <a:ext cx="3696081" cy="274320"/>
+          </a:xfrm>
+          <a:prstGeom prst="rect">
+            <a:avLst/>
+          </a:prstGeom>
+          <a:noFill/>
+          <a:ln/>
+        </p:spPr>
+        <p:txBody>
+          <a:bodyPr wrap="square" lIns="0" tIns="0" rIns="0" bIns="0" rtlCol="0" anchor="ctr"/>
+          <a:lstStyle/>
+          <a:p>
+            <a:pPr indent="0" marL="0">
+              <a:buNone/>
+            </a:pPr>
+            <a:r>
+              <a:rPr lang="en-US" sz="1100" b="1" dirty="0">
+                <a:solidFill>
+                  <a:srgbClr val="075985"/>
+                </a:solidFill>
+                <a:latin typeface="Calibri" pitchFamily="34" charset="0"/>
+                <a:ea typeface="Calibri" pitchFamily="34" charset="-122"/>
+                <a:cs typeface="Calibri" pitchFamily="34" charset="-120"/>
+              </a:rPr>
+              <a:t>DA COMPRENDERE OGGI</a:t>
+            </a:r>
+            <a:pPr indent="0" marL="0">
+              <a:buNone/>
+            </a:pPr>
+            <a:r>
+              <a:rPr lang="en-US" sz="1100" dirty="0">
+                <a:solidFill>
+                  <a:srgbClr val="075985"/>
+                </a:solidFill>
+                <a:latin typeface="Calibri" pitchFamily="34" charset="0"/>
+                <a:ea typeface="Calibri" pitchFamily="34" charset="-122"/>
+                <a:cs typeface="Calibri" pitchFamily="34" charset="-120"/>
+              </a:rPr>
+              <a:t> · impacchettare e pubblicare</a:t>
+            </a:r>
+            <a:endParaRPr lang="en-US" sz="1100" dirty="0"/>
+          </a:p>
+        </p:txBody>
+      </p:sp>
+      <p:sp>
+        <p:nvSpPr>
           <p:cNvPr id="25" name="Slide Number Placeholder 0"/>
           <p:cNvSpPr>
             <a:spLocks noGrp="1"/>
@@ -5735,6 +6290,158 @@
       </p:sp>
       <p:sp>
         <p:nvSpPr>
+          <p:cNvPr id="17" name="Shape 15"/>
+          <p:cNvSpPr/>
+          <p:nvPr/>
+        </p:nvSpPr>
+        <p:spPr>
+          <a:xfrm>
+            <a:off x="7875600" y="91440"/>
+            <a:ext cx="3767455" cy="274320"/>
+          </a:xfrm>
+          <a:prstGeom prst="rect">
+            <a:avLst/>
+          </a:prstGeom>
+          <a:solidFill>
+            <a:srgbClr val="FEF3C7"/>
+          </a:solidFill>
+          <a:ln w="12700">
+            <a:solidFill>
+              <a:srgbClr val="B45309"/>
+            </a:solidFill>
+            <a:prstDash val="solid"/>
+          </a:ln>
+        </p:spPr>
+      </p:sp>
+      <p:sp>
+        <p:nvSpPr>
+          <p:cNvPr id="18" name="Shape 16"/>
+          <p:cNvSpPr/>
+          <p:nvPr/>
+        </p:nvSpPr>
+        <p:spPr>
+          <a:xfrm>
+            <a:off x="7875600" y="91440"/>
+            <a:ext cx="27432" cy="274320"/>
+          </a:xfrm>
+          <a:prstGeom prst="rect">
+            <a:avLst/>
+          </a:prstGeom>
+          <a:solidFill>
+            <a:srgbClr val="B45309"/>
+          </a:solidFill>
+          <a:ln w="12700">
+            <a:solidFill>
+              <a:srgbClr val="B45309"/>
+            </a:solidFill>
+            <a:prstDash val="solid"/>
+          </a:ln>
+        </p:spPr>
+      </p:sp>
+      <p:sp>
+        <p:nvSpPr>
+          <p:cNvPr id="19" name="Shape 17"/>
+          <p:cNvSpPr/>
+          <p:nvPr/>
+        </p:nvSpPr>
+        <p:spPr>
+          <a:xfrm>
+            <a:off x="7930464" y="91440"/>
+            <a:ext cx="27432" cy="274320"/>
+          </a:xfrm>
+          <a:prstGeom prst="rect">
+            <a:avLst/>
+          </a:prstGeom>
+          <a:solidFill>
+            <a:srgbClr val="B45309"/>
+          </a:solidFill>
+          <a:ln w="12700">
+            <a:solidFill>
+              <a:srgbClr val="B45309"/>
+            </a:solidFill>
+            <a:prstDash val="solid"/>
+          </a:ln>
+        </p:spPr>
+      </p:sp>
+      <p:pic>
+        <p:nvPicPr>
+          <p:cNvPr id="20" name="Image 0" descr="preencoded.png">    </p:cNvPr>
+          <p:cNvPicPr>
+            <a:picLocks noChangeAspect="1"/>
+          </p:cNvPicPr>
+          <p:nvPr/>
+        </p:nvPicPr>
+        <p:blipFill>
+          <a:blip r:embed="rId1"/>
+          <a:stretch>
+            <a:fillRect/>
+          </a:stretch>
+        </p:blipFill>
+        <p:spPr>
+          <a:xfrm>
+            <a:off x="8003616" y="128016"/>
+            <a:ext cx="201168" cy="201168"/>
+          </a:xfrm>
+          <a:prstGeom prst="rect">
+            <a:avLst/>
+          </a:prstGeom>
+        </p:spPr>
+      </p:pic>
+      <p:sp>
+        <p:nvSpPr>
+          <p:cNvPr id="21" name="Text 18"/>
+          <p:cNvSpPr txBox="1"/>
+          <p:nvPr/>
+        </p:nvSpPr>
+        <p:spPr>
+          <a:xfrm>
+            <a:off x="8259648" y="91440"/>
+            <a:ext cx="3346831" cy="274320"/>
+          </a:xfrm>
+          <a:prstGeom prst="rect">
+            <a:avLst/>
+          </a:prstGeom>
+          <a:noFill/>
+          <a:ln/>
+        </p:spPr>
+        <p:txBody>
+          <a:bodyPr wrap="square" lIns="0" tIns="0" rIns="0" bIns="0" rtlCol="0" anchor="ctr"/>
+          <a:lstStyle/>
+          <a:p>
+            <a:pPr indent="0" marL="0">
+              <a:buNone/>
+            </a:pPr>
+            <a:r>
+              <a:rPr lang="en-US" sz="1100" b="1" dirty="0">
+                <a:solidFill>
+                  <a:srgbClr val="92400E"/>
+                </a:solidFill>
+                <a:latin typeface="Calibri" pitchFamily="34" charset="0"/>
+                <a:ea typeface="Calibri" pitchFamily="34" charset="-122"/>
+                <a:cs typeface="Calibri" pitchFamily="34" charset="-120"/>
+              </a:rPr>
+              <a:t>DA UTILIZZARE OGGI</a:t>
+            </a:r>
+            <a:pPr indent="0" marL="0">
+              <a:buNone/>
+            </a:pPr>
+            <a:r>
+              <a:rPr lang="en-US" sz="1100" dirty="0">
+                <a:solidFill>
+                  <a:srgbClr val="92400E"/>
+                </a:solidFill>
+                <a:latin typeface="Calibri" pitchFamily="34" charset="0"/>
+                <a:ea typeface="Calibri" pitchFamily="34" charset="-122"/>
+                <a:cs typeface="Calibri" pitchFamily="34" charset="-120"/>
+              </a:rPr>
+              <a:t> · gli strumenti di PRG32</a:t>
+            </a:r>
+            <a:endParaRPr lang="en-US" sz="1100" dirty="0"/>
+          </a:p>
+        </p:txBody>
+      </p:sp>
+      <p:sp>
+        <p:nvSpPr>
           <p:cNvPr id="25" name="Slide Number Placeholder 0"/>
           <p:cNvSpPr>
             <a:spLocks noGrp="1"/>
@@ -6537,6 +7244,158 @@
       </p:sp>
       <p:sp>
         <p:nvSpPr>
+          <p:cNvPr id="17" name="Shape 15"/>
+          <p:cNvSpPr/>
+          <p:nvPr/>
+        </p:nvSpPr>
+        <p:spPr>
+          <a:xfrm>
+            <a:off x="7875600" y="91440"/>
+            <a:ext cx="3767455" cy="274320"/>
+          </a:xfrm>
+          <a:prstGeom prst="rect">
+            <a:avLst/>
+          </a:prstGeom>
+          <a:solidFill>
+            <a:srgbClr val="FEF3C7"/>
+          </a:solidFill>
+          <a:ln w="12700">
+            <a:solidFill>
+              <a:srgbClr val="B45309"/>
+            </a:solidFill>
+            <a:prstDash val="solid"/>
+          </a:ln>
+        </p:spPr>
+      </p:sp>
+      <p:sp>
+        <p:nvSpPr>
+          <p:cNvPr id="18" name="Shape 16"/>
+          <p:cNvSpPr/>
+          <p:nvPr/>
+        </p:nvSpPr>
+        <p:spPr>
+          <a:xfrm>
+            <a:off x="7875600" y="91440"/>
+            <a:ext cx="27432" cy="274320"/>
+          </a:xfrm>
+          <a:prstGeom prst="rect">
+            <a:avLst/>
+          </a:prstGeom>
+          <a:solidFill>
+            <a:srgbClr val="B45309"/>
+          </a:solidFill>
+          <a:ln w="12700">
+            <a:solidFill>
+              <a:srgbClr val="B45309"/>
+            </a:solidFill>
+            <a:prstDash val="solid"/>
+          </a:ln>
+        </p:spPr>
+      </p:sp>
+      <p:sp>
+        <p:nvSpPr>
+          <p:cNvPr id="19" name="Shape 17"/>
+          <p:cNvSpPr/>
+          <p:nvPr/>
+        </p:nvSpPr>
+        <p:spPr>
+          <a:xfrm>
+            <a:off x="7930464" y="91440"/>
+            <a:ext cx="27432" cy="274320"/>
+          </a:xfrm>
+          <a:prstGeom prst="rect">
+            <a:avLst/>
+          </a:prstGeom>
+          <a:solidFill>
+            <a:srgbClr val="B45309"/>
+          </a:solidFill>
+          <a:ln w="12700">
+            <a:solidFill>
+              <a:srgbClr val="B45309"/>
+            </a:solidFill>
+            <a:prstDash val="solid"/>
+          </a:ln>
+        </p:spPr>
+      </p:sp>
+      <p:pic>
+        <p:nvPicPr>
+          <p:cNvPr id="20" name="Image 0" descr="preencoded.png">    </p:cNvPr>
+          <p:cNvPicPr>
+            <a:picLocks noChangeAspect="1"/>
+          </p:cNvPicPr>
+          <p:nvPr/>
+        </p:nvPicPr>
+        <p:blipFill>
+          <a:blip r:embed="rId1"/>
+          <a:stretch>
+            <a:fillRect/>
+          </a:stretch>
+        </p:blipFill>
+        <p:spPr>
+          <a:xfrm>
+            <a:off x="8003616" y="128016"/>
+            <a:ext cx="201168" cy="201168"/>
+          </a:xfrm>
+          <a:prstGeom prst="rect">
+            <a:avLst/>
+          </a:prstGeom>
+        </p:spPr>
+      </p:pic>
+      <p:sp>
+        <p:nvSpPr>
+          <p:cNvPr id="21" name="Text 18"/>
+          <p:cNvSpPr txBox="1"/>
+          <p:nvPr/>
+        </p:nvSpPr>
+        <p:spPr>
+          <a:xfrm>
+            <a:off x="8259648" y="91440"/>
+            <a:ext cx="3346831" cy="274320"/>
+          </a:xfrm>
+          <a:prstGeom prst="rect">
+            <a:avLst/>
+          </a:prstGeom>
+          <a:noFill/>
+          <a:ln/>
+        </p:spPr>
+        <p:txBody>
+          <a:bodyPr wrap="square" lIns="0" tIns="0" rIns="0" bIns="0" rtlCol="0" anchor="ctr"/>
+          <a:lstStyle/>
+          <a:p>
+            <a:pPr indent="0" marL="0">
+              <a:buNone/>
+            </a:pPr>
+            <a:r>
+              <a:rPr lang="en-US" sz="1100" b="1" dirty="0">
+                <a:solidFill>
+                  <a:srgbClr val="92400E"/>
+                </a:solidFill>
+                <a:latin typeface="Calibri" pitchFamily="34" charset="0"/>
+                <a:ea typeface="Calibri" pitchFamily="34" charset="-122"/>
+                <a:cs typeface="Calibri" pitchFamily="34" charset="-120"/>
+              </a:rPr>
+              <a:t>DA UTILIZZARE OGGI</a:t>
+            </a:r>
+            <a:pPr indent="0" marL="0">
+              <a:buNone/>
+            </a:pPr>
+            <a:r>
+              <a:rPr lang="en-US" sz="1100" dirty="0">
+                <a:solidFill>
+                  <a:srgbClr val="92400E"/>
+                </a:solidFill>
+                <a:latin typeface="Calibri" pitchFamily="34" charset="0"/>
+                <a:ea typeface="Calibri" pitchFamily="34" charset="-122"/>
+                <a:cs typeface="Calibri" pitchFamily="34" charset="-120"/>
+              </a:rPr>
+              <a:t> · gli strumenti di PRG32</a:t>
+            </a:r>
+            <a:endParaRPr lang="en-US" sz="1100" dirty="0"/>
+          </a:p>
+        </p:txBody>
+      </p:sp>
+      <p:sp>
+        <p:nvSpPr>
           <p:cNvPr id="25" name="Slide Number Placeholder 0"/>
           <p:cNvSpPr>
             <a:spLocks noGrp="1"/>
@@ -7315,6 +8174,158 @@
                 <a:cs typeface="Calibri" pitchFamily="34" charset="-120"/>
               </a:rPr>
               <a:t>Schermo nero: confrontate il cablaggio del display con il firmware</a:t>
+            </a:r>
+            <a:endParaRPr lang="en-US" sz="1100" dirty="0"/>
+          </a:p>
+        </p:txBody>
+      </p:sp>
+      <p:sp>
+        <p:nvSpPr>
+          <p:cNvPr id="17" name="Shape 15"/>
+          <p:cNvSpPr/>
+          <p:nvPr/>
+        </p:nvSpPr>
+        <p:spPr>
+          <a:xfrm>
+            <a:off x="7875600" y="91440"/>
+            <a:ext cx="3767455" cy="274320"/>
+          </a:xfrm>
+          <a:prstGeom prst="rect">
+            <a:avLst/>
+          </a:prstGeom>
+          <a:solidFill>
+            <a:srgbClr val="FEF3C7"/>
+          </a:solidFill>
+          <a:ln w="12700">
+            <a:solidFill>
+              <a:srgbClr val="B45309"/>
+            </a:solidFill>
+            <a:prstDash val="solid"/>
+          </a:ln>
+        </p:spPr>
+      </p:sp>
+      <p:sp>
+        <p:nvSpPr>
+          <p:cNvPr id="18" name="Shape 16"/>
+          <p:cNvSpPr/>
+          <p:nvPr/>
+        </p:nvSpPr>
+        <p:spPr>
+          <a:xfrm>
+            <a:off x="7875600" y="91440"/>
+            <a:ext cx="27432" cy="274320"/>
+          </a:xfrm>
+          <a:prstGeom prst="rect">
+            <a:avLst/>
+          </a:prstGeom>
+          <a:solidFill>
+            <a:srgbClr val="B45309"/>
+          </a:solidFill>
+          <a:ln w="12700">
+            <a:solidFill>
+              <a:srgbClr val="B45309"/>
+            </a:solidFill>
+            <a:prstDash val="solid"/>
+          </a:ln>
+        </p:spPr>
+      </p:sp>
+      <p:sp>
+        <p:nvSpPr>
+          <p:cNvPr id="19" name="Shape 17"/>
+          <p:cNvSpPr/>
+          <p:nvPr/>
+        </p:nvSpPr>
+        <p:spPr>
+          <a:xfrm>
+            <a:off x="7930464" y="91440"/>
+            <a:ext cx="27432" cy="274320"/>
+          </a:xfrm>
+          <a:prstGeom prst="rect">
+            <a:avLst/>
+          </a:prstGeom>
+          <a:solidFill>
+            <a:srgbClr val="B45309"/>
+          </a:solidFill>
+          <a:ln w="12700">
+            <a:solidFill>
+              <a:srgbClr val="B45309"/>
+            </a:solidFill>
+            <a:prstDash val="solid"/>
+          </a:ln>
+        </p:spPr>
+      </p:sp>
+      <p:pic>
+        <p:nvPicPr>
+          <p:cNvPr id="20" name="Image 0" descr="preencoded.png">    </p:cNvPr>
+          <p:cNvPicPr>
+            <a:picLocks noChangeAspect="1"/>
+          </p:cNvPicPr>
+          <p:nvPr/>
+        </p:nvPicPr>
+        <p:blipFill>
+          <a:blip r:embed="rId1"/>
+          <a:stretch>
+            <a:fillRect/>
+          </a:stretch>
+        </p:blipFill>
+        <p:spPr>
+          <a:xfrm>
+            <a:off x="8003616" y="128016"/>
+            <a:ext cx="201168" cy="201168"/>
+          </a:xfrm>
+          <a:prstGeom prst="rect">
+            <a:avLst/>
+          </a:prstGeom>
+        </p:spPr>
+      </p:pic>
+      <p:sp>
+        <p:nvSpPr>
+          <p:cNvPr id="21" name="Text 18"/>
+          <p:cNvSpPr txBox="1"/>
+          <p:nvPr/>
+        </p:nvSpPr>
+        <p:spPr>
+          <a:xfrm>
+            <a:off x="8259648" y="91440"/>
+            <a:ext cx="3346831" cy="274320"/>
+          </a:xfrm>
+          <a:prstGeom prst="rect">
+            <a:avLst/>
+          </a:prstGeom>
+          <a:noFill/>
+          <a:ln/>
+        </p:spPr>
+        <p:txBody>
+          <a:bodyPr wrap="square" lIns="0" tIns="0" rIns="0" bIns="0" rtlCol="0" anchor="ctr"/>
+          <a:lstStyle/>
+          <a:p>
+            <a:pPr indent="0" marL="0">
+              <a:buNone/>
+            </a:pPr>
+            <a:r>
+              <a:rPr lang="en-US" sz="1100" b="1" dirty="0">
+                <a:solidFill>
+                  <a:srgbClr val="92400E"/>
+                </a:solidFill>
+                <a:latin typeface="Calibri" pitchFamily="34" charset="0"/>
+                <a:ea typeface="Calibri" pitchFamily="34" charset="-122"/>
+                <a:cs typeface="Calibri" pitchFamily="34" charset="-120"/>
+              </a:rPr>
+              <a:t>DA UTILIZZARE OGGI</a:t>
+            </a:r>
+            <a:pPr indent="0" marL="0">
+              <a:buNone/>
+            </a:pPr>
+            <a:r>
+              <a:rPr lang="en-US" sz="1100" dirty="0">
+                <a:solidFill>
+                  <a:srgbClr val="92400E"/>
+                </a:solidFill>
+                <a:latin typeface="Calibri" pitchFamily="34" charset="0"/>
+                <a:ea typeface="Calibri" pitchFamily="34" charset="-122"/>
+                <a:cs typeface="Calibri" pitchFamily="34" charset="-120"/>
+              </a:rPr>
+              <a:t> · gli strumenti di PRG32</a:t>
             </a:r>
             <a:endParaRPr lang="en-US" sz="1100" dirty="0"/>
           </a:p>
@@ -8703,6 +9714,158 @@
       </p:graphicFrame>
       <p:sp>
         <p:nvSpPr>
+          <p:cNvPr id="4" name="Shape 1"/>
+          <p:cNvSpPr/>
+          <p:nvPr/>
+        </p:nvSpPr>
+        <p:spPr>
+          <a:xfrm>
+            <a:off x="7875600" y="91440"/>
+            <a:ext cx="3767455" cy="274320"/>
+          </a:xfrm>
+          <a:prstGeom prst="rect">
+            <a:avLst/>
+          </a:prstGeom>
+          <a:solidFill>
+            <a:srgbClr val="FEF3C7"/>
+          </a:solidFill>
+          <a:ln w="12700">
+            <a:solidFill>
+              <a:srgbClr val="B45309"/>
+            </a:solidFill>
+            <a:prstDash val="solid"/>
+          </a:ln>
+        </p:spPr>
+      </p:sp>
+      <p:sp>
+        <p:nvSpPr>
+          <p:cNvPr id="5" name="Shape 2"/>
+          <p:cNvSpPr/>
+          <p:nvPr/>
+        </p:nvSpPr>
+        <p:spPr>
+          <a:xfrm>
+            <a:off x="7875600" y="91440"/>
+            <a:ext cx="27432" cy="274320"/>
+          </a:xfrm>
+          <a:prstGeom prst="rect">
+            <a:avLst/>
+          </a:prstGeom>
+          <a:solidFill>
+            <a:srgbClr val="B45309"/>
+          </a:solidFill>
+          <a:ln w="12700">
+            <a:solidFill>
+              <a:srgbClr val="B45309"/>
+            </a:solidFill>
+            <a:prstDash val="solid"/>
+          </a:ln>
+        </p:spPr>
+      </p:sp>
+      <p:sp>
+        <p:nvSpPr>
+          <p:cNvPr id="6" name="Shape 3"/>
+          <p:cNvSpPr/>
+          <p:nvPr/>
+        </p:nvSpPr>
+        <p:spPr>
+          <a:xfrm>
+            <a:off x="7930464" y="91440"/>
+            <a:ext cx="27432" cy="274320"/>
+          </a:xfrm>
+          <a:prstGeom prst="rect">
+            <a:avLst/>
+          </a:prstGeom>
+          <a:solidFill>
+            <a:srgbClr val="B45309"/>
+          </a:solidFill>
+          <a:ln w="12700">
+            <a:solidFill>
+              <a:srgbClr val="B45309"/>
+            </a:solidFill>
+            <a:prstDash val="solid"/>
+          </a:ln>
+        </p:spPr>
+      </p:sp>
+      <p:pic>
+        <p:nvPicPr>
+          <p:cNvPr id="7" name="Image 0" descr="preencoded.png">    </p:cNvPr>
+          <p:cNvPicPr>
+            <a:picLocks noChangeAspect="1"/>
+          </p:cNvPicPr>
+          <p:nvPr/>
+        </p:nvPicPr>
+        <p:blipFill>
+          <a:blip r:embed="rId1"/>
+          <a:stretch>
+            <a:fillRect/>
+          </a:stretch>
+        </p:blipFill>
+        <p:spPr>
+          <a:xfrm>
+            <a:off x="8003616" y="128016"/>
+            <a:ext cx="201168" cy="201168"/>
+          </a:xfrm>
+          <a:prstGeom prst="rect">
+            <a:avLst/>
+          </a:prstGeom>
+        </p:spPr>
+      </p:pic>
+      <p:sp>
+        <p:nvSpPr>
+          <p:cNvPr id="8" name="Text 4"/>
+          <p:cNvSpPr txBox="1"/>
+          <p:nvPr/>
+        </p:nvSpPr>
+        <p:spPr>
+          <a:xfrm>
+            <a:off x="8259648" y="91440"/>
+            <a:ext cx="3346831" cy="274320"/>
+          </a:xfrm>
+          <a:prstGeom prst="rect">
+            <a:avLst/>
+          </a:prstGeom>
+          <a:noFill/>
+          <a:ln/>
+        </p:spPr>
+        <p:txBody>
+          <a:bodyPr wrap="square" lIns="0" tIns="0" rIns="0" bIns="0" rtlCol="0" anchor="ctr"/>
+          <a:lstStyle/>
+          <a:p>
+            <a:pPr indent="0" marL="0">
+              <a:buNone/>
+            </a:pPr>
+            <a:r>
+              <a:rPr lang="en-US" sz="1100" b="1" dirty="0">
+                <a:solidFill>
+                  <a:srgbClr val="92400E"/>
+                </a:solidFill>
+                <a:latin typeface="Calibri" pitchFamily="34" charset="0"/>
+                <a:ea typeface="Calibri" pitchFamily="34" charset="-122"/>
+                <a:cs typeface="Calibri" pitchFamily="34" charset="-120"/>
+              </a:rPr>
+              <a:t>DA UTILIZZARE OGGI</a:t>
+            </a:r>
+            <a:pPr indent="0" marL="0">
+              <a:buNone/>
+            </a:pPr>
+            <a:r>
+              <a:rPr lang="en-US" sz="1100" dirty="0">
+                <a:solidFill>
+                  <a:srgbClr val="92400E"/>
+                </a:solidFill>
+                <a:latin typeface="Calibri" pitchFamily="34" charset="0"/>
+                <a:ea typeface="Calibri" pitchFamily="34" charset="-122"/>
+                <a:cs typeface="Calibri" pitchFamily="34" charset="-120"/>
+              </a:rPr>
+              <a:t> · gli strumenti di PRG32</a:t>
+            </a:r>
+            <a:endParaRPr lang="en-US" sz="1100" dirty="0"/>
+          </a:p>
+        </p:txBody>
+      </p:sp>
+      <p:sp>
+        <p:nvSpPr>
           <p:cNvPr id="25" name="Slide Number Placeholder 0"/>
           <p:cNvSpPr>
             <a:spLocks noGrp="1"/>
@@ -10666,6 +11829,285 @@
       </p:sp>
       <p:sp>
         <p:nvSpPr>
+          <p:cNvPr id="17" name="Shape 15"/>
+          <p:cNvSpPr/>
+          <p:nvPr/>
+        </p:nvSpPr>
+        <p:spPr>
+          <a:xfrm>
+            <a:off x="7875600" y="91440"/>
+            <a:ext cx="3767455" cy="274320"/>
+          </a:xfrm>
+          <a:prstGeom prst="rect">
+            <a:avLst/>
+          </a:prstGeom>
+          <a:solidFill>
+            <a:srgbClr val="FEF3C7"/>
+          </a:solidFill>
+          <a:ln w="12700">
+            <a:solidFill>
+              <a:srgbClr val="B45309"/>
+            </a:solidFill>
+            <a:prstDash val="solid"/>
+          </a:ln>
+        </p:spPr>
+      </p:sp>
+      <p:sp>
+        <p:nvSpPr>
+          <p:cNvPr id="18" name="Shape 16"/>
+          <p:cNvSpPr/>
+          <p:nvPr/>
+        </p:nvSpPr>
+        <p:spPr>
+          <a:xfrm>
+            <a:off x="7875600" y="91440"/>
+            <a:ext cx="27432" cy="274320"/>
+          </a:xfrm>
+          <a:prstGeom prst="rect">
+            <a:avLst/>
+          </a:prstGeom>
+          <a:solidFill>
+            <a:srgbClr val="B45309"/>
+          </a:solidFill>
+          <a:ln w="12700">
+            <a:solidFill>
+              <a:srgbClr val="B45309"/>
+            </a:solidFill>
+            <a:prstDash val="solid"/>
+          </a:ln>
+        </p:spPr>
+      </p:sp>
+      <p:sp>
+        <p:nvSpPr>
+          <p:cNvPr id="19" name="Shape 17"/>
+          <p:cNvSpPr/>
+          <p:nvPr/>
+        </p:nvSpPr>
+        <p:spPr>
+          <a:xfrm>
+            <a:off x="7930464" y="91440"/>
+            <a:ext cx="27432" cy="274320"/>
+          </a:xfrm>
+          <a:prstGeom prst="rect">
+            <a:avLst/>
+          </a:prstGeom>
+          <a:solidFill>
+            <a:srgbClr val="B45309"/>
+          </a:solidFill>
+          <a:ln w="12700">
+            <a:solidFill>
+              <a:srgbClr val="B45309"/>
+            </a:solidFill>
+            <a:prstDash val="solid"/>
+          </a:ln>
+        </p:spPr>
+      </p:sp>
+      <p:pic>
+        <p:nvPicPr>
+          <p:cNvPr id="20" name="Image 0" descr="preencoded.png">    </p:cNvPr>
+          <p:cNvPicPr>
+            <a:picLocks noChangeAspect="1"/>
+          </p:cNvPicPr>
+          <p:nvPr/>
+        </p:nvPicPr>
+        <p:blipFill>
+          <a:blip r:embed="rId1"/>
+          <a:stretch>
+            <a:fillRect/>
+          </a:stretch>
+        </p:blipFill>
+        <p:spPr>
+          <a:xfrm>
+            <a:off x="8003616" y="128016"/>
+            <a:ext cx="201168" cy="201168"/>
+          </a:xfrm>
+          <a:prstGeom prst="rect">
+            <a:avLst/>
+          </a:prstGeom>
+        </p:spPr>
+      </p:pic>
+      <p:sp>
+        <p:nvSpPr>
+          <p:cNvPr id="21" name="Text 18"/>
+          <p:cNvSpPr txBox="1"/>
+          <p:nvPr/>
+        </p:nvSpPr>
+        <p:spPr>
+          <a:xfrm>
+            <a:off x="8259648" y="91440"/>
+            <a:ext cx="3346831" cy="274320"/>
+          </a:xfrm>
+          <a:prstGeom prst="rect">
+            <a:avLst/>
+          </a:prstGeom>
+          <a:noFill/>
+          <a:ln/>
+        </p:spPr>
+        <p:txBody>
+          <a:bodyPr wrap="square" lIns="0" tIns="0" rIns="0" bIns="0" rtlCol="0" anchor="ctr"/>
+          <a:lstStyle/>
+          <a:p>
+            <a:pPr indent="0" marL="0">
+              <a:buNone/>
+            </a:pPr>
+            <a:r>
+              <a:rPr lang="en-US" sz="1100" b="1" dirty="0">
+                <a:solidFill>
+                  <a:srgbClr val="92400E"/>
+                </a:solidFill>
+                <a:latin typeface="Calibri" pitchFamily="34" charset="0"/>
+                <a:ea typeface="Calibri" pitchFamily="34" charset="-122"/>
+                <a:cs typeface="Calibri" pitchFamily="34" charset="-120"/>
+              </a:rPr>
+              <a:t>DA UTILIZZARE OGGI</a:t>
+            </a:r>
+            <a:pPr indent="0" marL="0">
+              <a:buNone/>
+            </a:pPr>
+            <a:r>
+              <a:rPr lang="en-US" sz="1100" dirty="0">
+                <a:solidFill>
+                  <a:srgbClr val="92400E"/>
+                </a:solidFill>
+                <a:latin typeface="Calibri" pitchFamily="34" charset="0"/>
+                <a:ea typeface="Calibri" pitchFamily="34" charset="-122"/>
+                <a:cs typeface="Calibri" pitchFamily="34" charset="-120"/>
+              </a:rPr>
+              <a:t> · gli strumenti di PRG32</a:t>
+            </a:r>
+            <a:endParaRPr lang="en-US" sz="1100" dirty="0"/>
+          </a:p>
+        </p:txBody>
+      </p:sp>
+      <p:sp>
+        <p:nvSpPr>
+          <p:cNvPr id="22" name="Shape 19"/>
+          <p:cNvSpPr/>
+          <p:nvPr/>
+        </p:nvSpPr>
+        <p:spPr>
+          <a:xfrm>
+            <a:off x="3911803" y="91440"/>
+            <a:ext cx="3854069" cy="274320"/>
+          </a:xfrm>
+          <a:prstGeom prst="rect">
+            <a:avLst/>
+          </a:prstGeom>
+          <a:solidFill>
+            <a:srgbClr val="E0F2FE"/>
+          </a:solidFill>
+          <a:ln w="12700">
+            <a:solidFill>
+              <a:srgbClr val="0369A1"/>
+            </a:solidFill>
+            <a:prstDash val="solid"/>
+          </a:ln>
+        </p:spPr>
+      </p:sp>
+      <p:sp>
+        <p:nvSpPr>
+          <p:cNvPr id="23" name="Shape 20"/>
+          <p:cNvSpPr/>
+          <p:nvPr/>
+        </p:nvSpPr>
+        <p:spPr>
+          <a:xfrm>
+            <a:off x="3911803" y="91440"/>
+            <a:ext cx="73152" cy="274320"/>
+          </a:xfrm>
+          <a:prstGeom prst="rect">
+            <a:avLst/>
+          </a:prstGeom>
+          <a:solidFill>
+            <a:srgbClr val="0369A1"/>
+          </a:solidFill>
+          <a:ln w="12700">
+            <a:solidFill>
+              <a:srgbClr val="0369A1"/>
+            </a:solidFill>
+            <a:prstDash val="solid"/>
+          </a:ln>
+        </p:spPr>
+      </p:sp>
+      <p:pic>
+        <p:nvPicPr>
+          <p:cNvPr id="24" name="Image 1" descr="preencoded.png">    </p:cNvPr>
+          <p:cNvPicPr>
+            <a:picLocks noChangeAspect="1"/>
+          </p:cNvPicPr>
+          <p:nvPr/>
+        </p:nvPicPr>
+        <p:blipFill>
+          <a:blip r:embed="rId2"/>
+          <a:stretch>
+            <a:fillRect/>
+          </a:stretch>
+        </p:blipFill>
+        <p:spPr>
+          <a:xfrm>
+            <a:off x="4039819" y="128016"/>
+            <a:ext cx="201168" cy="201168"/>
+          </a:xfrm>
+          <a:prstGeom prst="rect">
+            <a:avLst/>
+          </a:prstGeom>
+        </p:spPr>
+      </p:pic>
+      <p:sp>
+        <p:nvSpPr>
+          <p:cNvPr id="25" name="Text 21"/>
+          <p:cNvSpPr txBox="1"/>
+          <p:nvPr/>
+        </p:nvSpPr>
+        <p:spPr>
+          <a:xfrm>
+            <a:off x="4295851" y="91440"/>
+            <a:ext cx="3433445" cy="274320"/>
+          </a:xfrm>
+          <a:prstGeom prst="rect">
+            <a:avLst/>
+          </a:prstGeom>
+          <a:noFill/>
+          <a:ln/>
+        </p:spPr>
+        <p:txBody>
+          <a:bodyPr wrap="square" lIns="0" tIns="0" rIns="0" bIns="0" rtlCol="0" anchor="ctr"/>
+          <a:lstStyle/>
+          <a:p>
+            <a:pPr indent="0" marL="0">
+              <a:buNone/>
+            </a:pPr>
+            <a:r>
+              <a:rPr lang="en-US" sz="1100" b="1" dirty="0">
+                <a:solidFill>
+                  <a:srgbClr val="075985"/>
+                </a:solidFill>
+                <a:latin typeface="Calibri" pitchFamily="34" charset="0"/>
+                <a:ea typeface="Calibri" pitchFamily="34" charset="-122"/>
+                <a:cs typeface="Calibri" pitchFamily="34" charset="-120"/>
+              </a:rPr>
+              <a:t>DA COMPRENDERE OGGI</a:t>
+            </a:r>
+            <a:pPr indent="0" marL="0">
+              <a:buNone/>
+            </a:pPr>
+            <a:r>
+              <a:rPr lang="en-US" sz="1100" dirty="0">
+                <a:solidFill>
+                  <a:srgbClr val="075985"/>
+                </a:solidFill>
+                <a:latin typeface="Calibri" pitchFamily="34" charset="0"/>
+                <a:ea typeface="Calibri" pitchFamily="34" charset="-122"/>
+                <a:cs typeface="Calibri" pitchFamily="34" charset="-120"/>
+              </a:rPr>
+              <a:t> · la cartuccia portabile</a:t>
+            </a:r>
+            <a:endParaRPr lang="en-US" sz="1100" dirty="0"/>
+          </a:p>
+        </p:txBody>
+      </p:sp>
+      <p:sp>
+        <p:nvSpPr>
           <p:cNvPr id="25" name="Slide Number Placeholder 0"/>
           <p:cNvSpPr>
             <a:spLocks noGrp="1"/>
@@ -11400,6 +12842,133 @@
       </p:sp>
       <p:sp>
         <p:nvSpPr>
+          <p:cNvPr id="17" name="Shape 15"/>
+          <p:cNvSpPr/>
+          <p:nvPr/>
+        </p:nvSpPr>
+        <p:spPr>
+          <a:xfrm>
+            <a:off x="7788986" y="91440"/>
+            <a:ext cx="3854069" cy="274320"/>
+          </a:xfrm>
+          <a:prstGeom prst="rect">
+            <a:avLst/>
+          </a:prstGeom>
+          <a:solidFill>
+            <a:srgbClr val="E0F2FE"/>
+          </a:solidFill>
+          <a:ln w="12700">
+            <a:solidFill>
+              <a:srgbClr val="0369A1"/>
+            </a:solidFill>
+            <a:prstDash val="solid"/>
+          </a:ln>
+        </p:spPr>
+      </p:sp>
+      <p:sp>
+        <p:nvSpPr>
+          <p:cNvPr id="18" name="Shape 16"/>
+          <p:cNvSpPr/>
+          <p:nvPr/>
+        </p:nvSpPr>
+        <p:spPr>
+          <a:xfrm>
+            <a:off x="7788986" y="91440"/>
+            <a:ext cx="73152" cy="274320"/>
+          </a:xfrm>
+          <a:prstGeom prst="rect">
+            <a:avLst/>
+          </a:prstGeom>
+          <a:solidFill>
+            <a:srgbClr val="0369A1"/>
+          </a:solidFill>
+          <a:ln w="12700">
+            <a:solidFill>
+              <a:srgbClr val="0369A1"/>
+            </a:solidFill>
+            <a:prstDash val="solid"/>
+          </a:ln>
+        </p:spPr>
+      </p:sp>
+      <p:pic>
+        <p:nvPicPr>
+          <p:cNvPr id="19" name="Image 0" descr="preencoded.png">    </p:cNvPr>
+          <p:cNvPicPr>
+            <a:picLocks noChangeAspect="1"/>
+          </p:cNvPicPr>
+          <p:nvPr/>
+        </p:nvPicPr>
+        <p:blipFill>
+          <a:blip r:embed="rId1"/>
+          <a:stretch>
+            <a:fillRect/>
+          </a:stretch>
+        </p:blipFill>
+        <p:spPr>
+          <a:xfrm>
+            <a:off x="7917002" y="128016"/>
+            <a:ext cx="201168" cy="201168"/>
+          </a:xfrm>
+          <a:prstGeom prst="rect">
+            <a:avLst/>
+          </a:prstGeom>
+        </p:spPr>
+      </p:pic>
+      <p:sp>
+        <p:nvSpPr>
+          <p:cNvPr id="20" name="Text 17"/>
+          <p:cNvSpPr txBox="1"/>
+          <p:nvPr/>
+        </p:nvSpPr>
+        <p:spPr>
+          <a:xfrm>
+            <a:off x="8173034" y="91440"/>
+            <a:ext cx="3433445" cy="274320"/>
+          </a:xfrm>
+          <a:prstGeom prst="rect">
+            <a:avLst/>
+          </a:prstGeom>
+          <a:noFill/>
+          <a:ln/>
+        </p:spPr>
+        <p:txBody>
+          <a:bodyPr wrap="square" lIns="0" tIns="0" rIns="0" bIns="0" rtlCol="0" anchor="ctr"/>
+          <a:lstStyle/>
+          <a:p>
+            <a:pPr indent="0" marL="0">
+              <a:buNone/>
+            </a:pPr>
+            <a:r>
+              <a:rPr lang="en-US" sz="1100" b="1" dirty="0">
+                <a:solidFill>
+                  <a:srgbClr val="075985"/>
+                </a:solidFill>
+                <a:latin typeface="Calibri" pitchFamily="34" charset="0"/>
+                <a:ea typeface="Calibri" pitchFamily="34" charset="-122"/>
+                <a:cs typeface="Calibri" pitchFamily="34" charset="-120"/>
+              </a:rPr>
+              <a:t>DA COMPRENDERE OGGI</a:t>
+            </a:r>
+            <a:pPr indent="0" marL="0">
+              <a:buNone/>
+            </a:pPr>
+            <a:r>
+              <a:rPr lang="en-US" sz="1100" dirty="0">
+                <a:solidFill>
+                  <a:srgbClr val="075985"/>
+                </a:solidFill>
+                <a:latin typeface="Calibri" pitchFamily="34" charset="0"/>
+                <a:ea typeface="Calibri" pitchFamily="34" charset="-122"/>
+                <a:cs typeface="Calibri" pitchFamily="34" charset="-120"/>
+              </a:rPr>
+              <a:t> · la cartuccia portabile</a:t>
+            </a:r>
+            <a:endParaRPr lang="en-US" sz="1100" dirty="0"/>
+          </a:p>
+        </p:txBody>
+      </p:sp>
+      <p:sp>
+        <p:nvSpPr>
           <p:cNvPr id="25" name="Slide Number Placeholder 0"/>
           <p:cNvSpPr>
             <a:spLocks noGrp="1"/>
@@ -12287,6 +13856,133 @@
       </p:sp>
       <p:sp>
         <p:nvSpPr>
+          <p:cNvPr id="17" name="Shape 15"/>
+          <p:cNvSpPr/>
+          <p:nvPr/>
+        </p:nvSpPr>
+        <p:spPr>
+          <a:xfrm>
+            <a:off x="7526350" y="91440"/>
+            <a:ext cx="4116705" cy="274320"/>
+          </a:xfrm>
+          <a:prstGeom prst="rect">
+            <a:avLst/>
+          </a:prstGeom>
+          <a:solidFill>
+            <a:srgbClr val="E0F2FE"/>
+          </a:solidFill>
+          <a:ln w="12700">
+            <a:solidFill>
+              <a:srgbClr val="0369A1"/>
+            </a:solidFill>
+            <a:prstDash val="solid"/>
+          </a:ln>
+        </p:spPr>
+      </p:sp>
+      <p:sp>
+        <p:nvSpPr>
+          <p:cNvPr id="18" name="Shape 16"/>
+          <p:cNvSpPr/>
+          <p:nvPr/>
+        </p:nvSpPr>
+        <p:spPr>
+          <a:xfrm>
+            <a:off x="7526350" y="91440"/>
+            <a:ext cx="73152" cy="274320"/>
+          </a:xfrm>
+          <a:prstGeom prst="rect">
+            <a:avLst/>
+          </a:prstGeom>
+          <a:solidFill>
+            <a:srgbClr val="0369A1"/>
+          </a:solidFill>
+          <a:ln w="12700">
+            <a:solidFill>
+              <a:srgbClr val="0369A1"/>
+            </a:solidFill>
+            <a:prstDash val="solid"/>
+          </a:ln>
+        </p:spPr>
+      </p:sp>
+      <p:pic>
+        <p:nvPicPr>
+          <p:cNvPr id="19" name="Image 0" descr="preencoded.png">    </p:cNvPr>
+          <p:cNvPicPr>
+            <a:picLocks noChangeAspect="1"/>
+          </p:cNvPicPr>
+          <p:nvPr/>
+        </p:nvPicPr>
+        <p:blipFill>
+          <a:blip r:embed="rId1"/>
+          <a:stretch>
+            <a:fillRect/>
+          </a:stretch>
+        </p:blipFill>
+        <p:spPr>
+          <a:xfrm>
+            <a:off x="7654366" y="128016"/>
+            <a:ext cx="201168" cy="201168"/>
+          </a:xfrm>
+          <a:prstGeom prst="rect">
+            <a:avLst/>
+          </a:prstGeom>
+        </p:spPr>
+      </p:pic>
+      <p:sp>
+        <p:nvSpPr>
+          <p:cNvPr id="20" name="Text 17"/>
+          <p:cNvSpPr txBox="1"/>
+          <p:nvPr/>
+        </p:nvSpPr>
+        <p:spPr>
+          <a:xfrm>
+            <a:off x="7910398" y="91440"/>
+            <a:ext cx="3696081" cy="274320"/>
+          </a:xfrm>
+          <a:prstGeom prst="rect">
+            <a:avLst/>
+          </a:prstGeom>
+          <a:noFill/>
+          <a:ln/>
+        </p:spPr>
+        <p:txBody>
+          <a:bodyPr wrap="square" lIns="0" tIns="0" rIns="0" bIns="0" rtlCol="0" anchor="ctr"/>
+          <a:lstStyle/>
+          <a:p>
+            <a:pPr indent="0" marL="0">
+              <a:buNone/>
+            </a:pPr>
+            <a:r>
+              <a:rPr lang="en-US" sz="1100" b="1" dirty="0">
+                <a:solidFill>
+                  <a:srgbClr val="075985"/>
+                </a:solidFill>
+                <a:latin typeface="Calibri" pitchFamily="34" charset="0"/>
+                <a:ea typeface="Calibri" pitchFamily="34" charset="-122"/>
+                <a:cs typeface="Calibri" pitchFamily="34" charset="-120"/>
+              </a:rPr>
+              <a:t>DA COMPRENDERE OGGI</a:t>
+            </a:r>
+            <a:pPr indent="0" marL="0">
+              <a:buNone/>
+            </a:pPr>
+            <a:r>
+              <a:rPr lang="en-US" sz="1100" dirty="0">
+                <a:solidFill>
+                  <a:srgbClr val="075985"/>
+                </a:solidFill>
+                <a:latin typeface="Calibri" pitchFamily="34" charset="0"/>
+                <a:ea typeface="Calibri" pitchFamily="34" charset="-122"/>
+                <a:cs typeface="Calibri" pitchFamily="34" charset="-120"/>
+              </a:rPr>
+              <a:t> · impacchettare e pubblicare</a:t>
+            </a:r>
+            <a:endParaRPr lang="en-US" sz="1100" dirty="0"/>
+          </a:p>
+        </p:txBody>
+      </p:sp>
+      <p:sp>
+        <p:nvSpPr>
           <p:cNvPr id="25" name="Slide Number Placeholder 0"/>
           <p:cNvSpPr>
             <a:spLocks noGrp="1"/>
@@ -13310,6 +15006,133 @@
       </p:sp>
       <p:sp>
         <p:nvSpPr>
+          <p:cNvPr id="17" name="Shape 15"/>
+          <p:cNvSpPr/>
+          <p:nvPr/>
+        </p:nvSpPr>
+        <p:spPr>
+          <a:xfrm>
+            <a:off x="7526350" y="91440"/>
+            <a:ext cx="4116705" cy="274320"/>
+          </a:xfrm>
+          <a:prstGeom prst="rect">
+            <a:avLst/>
+          </a:prstGeom>
+          <a:solidFill>
+            <a:srgbClr val="E0F2FE"/>
+          </a:solidFill>
+          <a:ln w="12700">
+            <a:solidFill>
+              <a:srgbClr val="0369A1"/>
+            </a:solidFill>
+            <a:prstDash val="solid"/>
+          </a:ln>
+        </p:spPr>
+      </p:sp>
+      <p:sp>
+        <p:nvSpPr>
+          <p:cNvPr id="18" name="Shape 16"/>
+          <p:cNvSpPr/>
+          <p:nvPr/>
+        </p:nvSpPr>
+        <p:spPr>
+          <a:xfrm>
+            <a:off x="7526350" y="91440"/>
+            <a:ext cx="73152" cy="274320"/>
+          </a:xfrm>
+          <a:prstGeom prst="rect">
+            <a:avLst/>
+          </a:prstGeom>
+          <a:solidFill>
+            <a:srgbClr val="0369A1"/>
+          </a:solidFill>
+          <a:ln w="12700">
+            <a:solidFill>
+              <a:srgbClr val="0369A1"/>
+            </a:solidFill>
+            <a:prstDash val="solid"/>
+          </a:ln>
+        </p:spPr>
+      </p:sp>
+      <p:pic>
+        <p:nvPicPr>
+          <p:cNvPr id="19" name="Image 0" descr="preencoded.png">    </p:cNvPr>
+          <p:cNvPicPr>
+            <a:picLocks noChangeAspect="1"/>
+          </p:cNvPicPr>
+          <p:nvPr/>
+        </p:nvPicPr>
+        <p:blipFill>
+          <a:blip r:embed="rId1"/>
+          <a:stretch>
+            <a:fillRect/>
+          </a:stretch>
+        </p:blipFill>
+        <p:spPr>
+          <a:xfrm>
+            <a:off x="7654366" y="128016"/>
+            <a:ext cx="201168" cy="201168"/>
+          </a:xfrm>
+          <a:prstGeom prst="rect">
+            <a:avLst/>
+          </a:prstGeom>
+        </p:spPr>
+      </p:pic>
+      <p:sp>
+        <p:nvSpPr>
+          <p:cNvPr id="20" name="Text 17"/>
+          <p:cNvSpPr txBox="1"/>
+          <p:nvPr/>
+        </p:nvSpPr>
+        <p:spPr>
+          <a:xfrm>
+            <a:off x="7910398" y="91440"/>
+            <a:ext cx="3696081" cy="274320"/>
+          </a:xfrm>
+          <a:prstGeom prst="rect">
+            <a:avLst/>
+          </a:prstGeom>
+          <a:noFill/>
+          <a:ln/>
+        </p:spPr>
+        <p:txBody>
+          <a:bodyPr wrap="square" lIns="0" tIns="0" rIns="0" bIns="0" rtlCol="0" anchor="ctr"/>
+          <a:lstStyle/>
+          <a:p>
+            <a:pPr indent="0" marL="0">
+              <a:buNone/>
+            </a:pPr>
+            <a:r>
+              <a:rPr lang="en-US" sz="1100" b="1" dirty="0">
+                <a:solidFill>
+                  <a:srgbClr val="075985"/>
+                </a:solidFill>
+                <a:latin typeface="Calibri" pitchFamily="34" charset="0"/>
+                <a:ea typeface="Calibri" pitchFamily="34" charset="-122"/>
+                <a:cs typeface="Calibri" pitchFamily="34" charset="-120"/>
+              </a:rPr>
+              <a:t>DA COMPRENDERE OGGI</a:t>
+            </a:r>
+            <a:pPr indent="0" marL="0">
+              <a:buNone/>
+            </a:pPr>
+            <a:r>
+              <a:rPr lang="en-US" sz="1100" dirty="0">
+                <a:solidFill>
+                  <a:srgbClr val="075985"/>
+                </a:solidFill>
+                <a:latin typeface="Calibri" pitchFamily="34" charset="0"/>
+                <a:ea typeface="Calibri" pitchFamily="34" charset="-122"/>
+                <a:cs typeface="Calibri" pitchFamily="34" charset="-120"/>
+              </a:rPr>
+              <a:t> · impacchettare e pubblicare</a:t>
+            </a:r>
+            <a:endParaRPr lang="en-US" sz="1100" dirty="0"/>
+          </a:p>
+        </p:txBody>
+      </p:sp>
+      <p:sp>
+        <p:nvSpPr>
           <p:cNvPr id="25" name="Slide Number Placeholder 0"/>
           <p:cNvSpPr>
             <a:spLocks noGrp="1"/>
@@ -14112,6 +15935,133 @@
       </p:sp>
       <p:sp>
         <p:nvSpPr>
+          <p:cNvPr id="17" name="Shape 15"/>
+          <p:cNvSpPr/>
+          <p:nvPr/>
+        </p:nvSpPr>
+        <p:spPr>
+          <a:xfrm>
+            <a:off x="7788986" y="91440"/>
+            <a:ext cx="3854069" cy="274320"/>
+          </a:xfrm>
+          <a:prstGeom prst="rect">
+            <a:avLst/>
+          </a:prstGeom>
+          <a:solidFill>
+            <a:srgbClr val="E0F2FE"/>
+          </a:solidFill>
+          <a:ln w="12700">
+            <a:solidFill>
+              <a:srgbClr val="0369A1"/>
+            </a:solidFill>
+            <a:prstDash val="solid"/>
+          </a:ln>
+        </p:spPr>
+      </p:sp>
+      <p:sp>
+        <p:nvSpPr>
+          <p:cNvPr id="18" name="Shape 16"/>
+          <p:cNvSpPr/>
+          <p:nvPr/>
+        </p:nvSpPr>
+        <p:spPr>
+          <a:xfrm>
+            <a:off x="7788986" y="91440"/>
+            <a:ext cx="73152" cy="274320"/>
+          </a:xfrm>
+          <a:prstGeom prst="rect">
+            <a:avLst/>
+          </a:prstGeom>
+          <a:solidFill>
+            <a:srgbClr val="0369A1"/>
+          </a:solidFill>
+          <a:ln w="12700">
+            <a:solidFill>
+              <a:srgbClr val="0369A1"/>
+            </a:solidFill>
+            <a:prstDash val="solid"/>
+          </a:ln>
+        </p:spPr>
+      </p:sp>
+      <p:pic>
+        <p:nvPicPr>
+          <p:cNvPr id="19" name="Image 0" descr="preencoded.png">    </p:cNvPr>
+          <p:cNvPicPr>
+            <a:picLocks noChangeAspect="1"/>
+          </p:cNvPicPr>
+          <p:nvPr/>
+        </p:nvPicPr>
+        <p:blipFill>
+          <a:blip r:embed="rId1"/>
+          <a:stretch>
+            <a:fillRect/>
+          </a:stretch>
+        </p:blipFill>
+        <p:spPr>
+          <a:xfrm>
+            <a:off x="7917002" y="128016"/>
+            <a:ext cx="201168" cy="201168"/>
+          </a:xfrm>
+          <a:prstGeom prst="rect">
+            <a:avLst/>
+          </a:prstGeom>
+        </p:spPr>
+      </p:pic>
+      <p:sp>
+        <p:nvSpPr>
+          <p:cNvPr id="20" name="Text 17"/>
+          <p:cNvSpPr txBox="1"/>
+          <p:nvPr/>
+        </p:nvSpPr>
+        <p:spPr>
+          <a:xfrm>
+            <a:off x="8173034" y="91440"/>
+            <a:ext cx="3433445" cy="274320"/>
+          </a:xfrm>
+          <a:prstGeom prst="rect">
+            <a:avLst/>
+          </a:prstGeom>
+          <a:noFill/>
+          <a:ln/>
+        </p:spPr>
+        <p:txBody>
+          <a:bodyPr wrap="square" lIns="0" tIns="0" rIns="0" bIns="0" rtlCol="0" anchor="ctr"/>
+          <a:lstStyle/>
+          <a:p>
+            <a:pPr indent="0" marL="0">
+              <a:buNone/>
+            </a:pPr>
+            <a:r>
+              <a:rPr lang="en-US" sz="1100" b="1" dirty="0">
+                <a:solidFill>
+                  <a:srgbClr val="075985"/>
+                </a:solidFill>
+                <a:latin typeface="Calibri" pitchFamily="34" charset="0"/>
+                <a:ea typeface="Calibri" pitchFamily="34" charset="-122"/>
+                <a:cs typeface="Calibri" pitchFamily="34" charset="-120"/>
+              </a:rPr>
+              <a:t>DA COMPRENDERE OGGI</a:t>
+            </a:r>
+            <a:pPr indent="0" marL="0">
+              <a:buNone/>
+            </a:pPr>
+            <a:r>
+              <a:rPr lang="en-US" sz="1100" dirty="0">
+                <a:solidFill>
+                  <a:srgbClr val="075985"/>
+                </a:solidFill>
+                <a:latin typeface="Calibri" pitchFamily="34" charset="0"/>
+                <a:ea typeface="Calibri" pitchFamily="34" charset="-122"/>
+                <a:cs typeface="Calibri" pitchFamily="34" charset="-120"/>
+              </a:rPr>
+              <a:t> · la cartuccia portabile</a:t>
+            </a:r>
+            <a:endParaRPr lang="en-US" sz="1100" dirty="0"/>
+          </a:p>
+        </p:txBody>
+      </p:sp>
+      <p:sp>
+        <p:nvSpPr>
           <p:cNvPr id="25" name="Slide Number Placeholder 0"/>
           <p:cNvSpPr>
             <a:spLocks noGrp="1"/>
@@ -14982,6 +16932,133 @@
       </p:sp>
       <p:sp>
         <p:nvSpPr>
+          <p:cNvPr id="17" name="Shape 15"/>
+          <p:cNvSpPr/>
+          <p:nvPr/>
+        </p:nvSpPr>
+        <p:spPr>
+          <a:xfrm>
+            <a:off x="7788986" y="91440"/>
+            <a:ext cx="3854069" cy="274320"/>
+          </a:xfrm>
+          <a:prstGeom prst="rect">
+            <a:avLst/>
+          </a:prstGeom>
+          <a:solidFill>
+            <a:srgbClr val="E0F2FE"/>
+          </a:solidFill>
+          <a:ln w="12700">
+            <a:solidFill>
+              <a:srgbClr val="0369A1"/>
+            </a:solidFill>
+            <a:prstDash val="solid"/>
+          </a:ln>
+        </p:spPr>
+      </p:sp>
+      <p:sp>
+        <p:nvSpPr>
+          <p:cNvPr id="18" name="Shape 16"/>
+          <p:cNvSpPr/>
+          <p:nvPr/>
+        </p:nvSpPr>
+        <p:spPr>
+          <a:xfrm>
+            <a:off x="7788986" y="91440"/>
+            <a:ext cx="73152" cy="274320"/>
+          </a:xfrm>
+          <a:prstGeom prst="rect">
+            <a:avLst/>
+          </a:prstGeom>
+          <a:solidFill>
+            <a:srgbClr val="0369A1"/>
+          </a:solidFill>
+          <a:ln w="12700">
+            <a:solidFill>
+              <a:srgbClr val="0369A1"/>
+            </a:solidFill>
+            <a:prstDash val="solid"/>
+          </a:ln>
+        </p:spPr>
+      </p:sp>
+      <p:pic>
+        <p:nvPicPr>
+          <p:cNvPr id="19" name="Image 0" descr="preencoded.png">    </p:cNvPr>
+          <p:cNvPicPr>
+            <a:picLocks noChangeAspect="1"/>
+          </p:cNvPicPr>
+          <p:nvPr/>
+        </p:nvPicPr>
+        <p:blipFill>
+          <a:blip r:embed="rId1"/>
+          <a:stretch>
+            <a:fillRect/>
+          </a:stretch>
+        </p:blipFill>
+        <p:spPr>
+          <a:xfrm>
+            <a:off x="7917002" y="128016"/>
+            <a:ext cx="201168" cy="201168"/>
+          </a:xfrm>
+          <a:prstGeom prst="rect">
+            <a:avLst/>
+          </a:prstGeom>
+        </p:spPr>
+      </p:pic>
+      <p:sp>
+        <p:nvSpPr>
+          <p:cNvPr id="20" name="Text 17"/>
+          <p:cNvSpPr txBox="1"/>
+          <p:nvPr/>
+        </p:nvSpPr>
+        <p:spPr>
+          <a:xfrm>
+            <a:off x="8173034" y="91440"/>
+            <a:ext cx="3433445" cy="274320"/>
+          </a:xfrm>
+          <a:prstGeom prst="rect">
+            <a:avLst/>
+          </a:prstGeom>
+          <a:noFill/>
+          <a:ln/>
+        </p:spPr>
+        <p:txBody>
+          <a:bodyPr wrap="square" lIns="0" tIns="0" rIns="0" bIns="0" rtlCol="0" anchor="ctr"/>
+          <a:lstStyle/>
+          <a:p>
+            <a:pPr indent="0" marL="0">
+              <a:buNone/>
+            </a:pPr>
+            <a:r>
+              <a:rPr lang="en-US" sz="1100" b="1" dirty="0">
+                <a:solidFill>
+                  <a:srgbClr val="075985"/>
+                </a:solidFill>
+                <a:latin typeface="Calibri" pitchFamily="34" charset="0"/>
+                <a:ea typeface="Calibri" pitchFamily="34" charset="-122"/>
+                <a:cs typeface="Calibri" pitchFamily="34" charset="-120"/>
+              </a:rPr>
+              <a:t>DA COMPRENDERE OGGI</a:t>
+            </a:r>
+            <a:pPr indent="0" marL="0">
+              <a:buNone/>
+            </a:pPr>
+            <a:r>
+              <a:rPr lang="en-US" sz="1100" dirty="0">
+                <a:solidFill>
+                  <a:srgbClr val="075985"/>
+                </a:solidFill>
+                <a:latin typeface="Calibri" pitchFamily="34" charset="0"/>
+                <a:ea typeface="Calibri" pitchFamily="34" charset="-122"/>
+                <a:cs typeface="Calibri" pitchFamily="34" charset="-120"/>
+              </a:rPr>
+              <a:t> · la cartuccia portabile</a:t>
+            </a:r>
+            <a:endParaRPr lang="en-US" sz="1100" dirty="0"/>
+          </a:p>
+        </p:txBody>
+      </p:sp>
+      <p:sp>
+        <p:nvSpPr>
           <p:cNvPr id="25" name="Slide Number Placeholder 0"/>
           <p:cNvSpPr>
             <a:spLocks noGrp="1"/>
@@ -15745,6 +17822,133 @@
               <a:t>Il vostro intero gioco, per due macchine: 16 kilobyte</a:t>
             </a:r>
             <a:endParaRPr lang="en-US" sz="1200" dirty="0"/>
+          </a:p>
+        </p:txBody>
+      </p:sp>
+      <p:sp>
+        <p:nvSpPr>
+          <p:cNvPr id="17" name="Shape 15"/>
+          <p:cNvSpPr/>
+          <p:nvPr/>
+        </p:nvSpPr>
+        <p:spPr>
+          <a:xfrm>
+            <a:off x="7526350" y="91440"/>
+            <a:ext cx="4116705" cy="274320"/>
+          </a:xfrm>
+          <a:prstGeom prst="rect">
+            <a:avLst/>
+          </a:prstGeom>
+          <a:solidFill>
+            <a:srgbClr val="E0F2FE"/>
+          </a:solidFill>
+          <a:ln w="12700">
+            <a:solidFill>
+              <a:srgbClr val="0369A1"/>
+            </a:solidFill>
+            <a:prstDash val="solid"/>
+          </a:ln>
+        </p:spPr>
+      </p:sp>
+      <p:sp>
+        <p:nvSpPr>
+          <p:cNvPr id="18" name="Shape 16"/>
+          <p:cNvSpPr/>
+          <p:nvPr/>
+        </p:nvSpPr>
+        <p:spPr>
+          <a:xfrm>
+            <a:off x="7526350" y="91440"/>
+            <a:ext cx="73152" cy="274320"/>
+          </a:xfrm>
+          <a:prstGeom prst="rect">
+            <a:avLst/>
+          </a:prstGeom>
+          <a:solidFill>
+            <a:srgbClr val="0369A1"/>
+          </a:solidFill>
+          <a:ln w="12700">
+            <a:solidFill>
+              <a:srgbClr val="0369A1"/>
+            </a:solidFill>
+            <a:prstDash val="solid"/>
+          </a:ln>
+        </p:spPr>
+      </p:sp>
+      <p:pic>
+        <p:nvPicPr>
+          <p:cNvPr id="19" name="Image 0" descr="preencoded.png">    </p:cNvPr>
+          <p:cNvPicPr>
+            <a:picLocks noChangeAspect="1"/>
+          </p:cNvPicPr>
+          <p:nvPr/>
+        </p:nvPicPr>
+        <p:blipFill>
+          <a:blip r:embed="rId1"/>
+          <a:stretch>
+            <a:fillRect/>
+          </a:stretch>
+        </p:blipFill>
+        <p:spPr>
+          <a:xfrm>
+            <a:off x="7654366" y="128016"/>
+            <a:ext cx="201168" cy="201168"/>
+          </a:xfrm>
+          <a:prstGeom prst="rect">
+            <a:avLst/>
+          </a:prstGeom>
+        </p:spPr>
+      </p:pic>
+      <p:sp>
+        <p:nvSpPr>
+          <p:cNvPr id="20" name="Text 17"/>
+          <p:cNvSpPr txBox="1"/>
+          <p:nvPr/>
+        </p:nvSpPr>
+        <p:spPr>
+          <a:xfrm>
+            <a:off x="7910398" y="91440"/>
+            <a:ext cx="3696081" cy="274320"/>
+          </a:xfrm>
+          <a:prstGeom prst="rect">
+            <a:avLst/>
+          </a:prstGeom>
+          <a:noFill/>
+          <a:ln/>
+        </p:spPr>
+        <p:txBody>
+          <a:bodyPr wrap="square" lIns="0" tIns="0" rIns="0" bIns="0" rtlCol="0" anchor="ctr"/>
+          <a:lstStyle/>
+          <a:p>
+            <a:pPr indent="0" marL="0">
+              <a:buNone/>
+            </a:pPr>
+            <a:r>
+              <a:rPr lang="en-US" sz="1100" b="1" dirty="0">
+                <a:solidFill>
+                  <a:srgbClr val="075985"/>
+                </a:solidFill>
+                <a:latin typeface="Calibri" pitchFamily="34" charset="0"/>
+                <a:ea typeface="Calibri" pitchFamily="34" charset="-122"/>
+                <a:cs typeface="Calibri" pitchFamily="34" charset="-120"/>
+              </a:rPr>
+              <a:t>DA COMPRENDERE OGGI</a:t>
+            </a:r>
+            <a:pPr indent="0" marL="0">
+              <a:buNone/>
+            </a:pPr>
+            <a:r>
+              <a:rPr lang="en-US" sz="1100" dirty="0">
+                <a:solidFill>
+                  <a:srgbClr val="075985"/>
+                </a:solidFill>
+                <a:latin typeface="Calibri" pitchFamily="34" charset="0"/>
+                <a:ea typeface="Calibri" pitchFamily="34" charset="-122"/>
+                <a:cs typeface="Calibri" pitchFamily="34" charset="-120"/>
+              </a:rPr>
+              <a:t> · impacchettare e pubblicare</a:t>
+            </a:r>
+            <a:endParaRPr lang="en-US" sz="1100" dirty="0"/>
           </a:p>
         </p:txBody>
       </p:sp>

--- a/it/slides/23-Architettura_dei_Calcolatori-Verm1_sul_Cartridge_Store-Codice.pptx
+++ b/it/slides/23-Architettura_dei_Calcolatori-Verm1_sul_Cartridge_Store-Codice.pptx
@@ -123,42 +123,42 @@
   <p:extLst>
     <p:ext uri="{521415D9-36F7-43E2-AB2F-B90AF26B5E84}">
       <p14:sectionLst xmlns:p14="http://schemas.microsoft.com/office/powerpoint/2010/main">
-        <p14:section name="Apertura" id="{5abf28a3-13e6-c843-42b1-c50f6e8dc918}">
+        <p14:section name="Apertura" id="{6eb04d7c-105a-2b57-463d-0f5a886a3ee2}">
           <p14:sldIdLst>
             <p14:sldId id="256"/>
             <p14:sldId id="257"/>
           </p14:sldIdLst>
         </p14:section>
-        <p14:section name="Passo 1: un sorgente, due cartucce" id="{6196a213-4e29-e120-d94d-e01b53386781}">
+        <p14:section name="Passo 1: un sorgente, due cartucce" id="{afaeed99-59fc-cfc0-07ae-c9fffe79bbda}">
           <p14:sldIdLst>
             <p14:sldId id="258"/>
             <p14:sldId id="259"/>
           </p14:sldIdLst>
         </p14:section>
-        <p14:section name="Passo 2: un'identità" id="{a43851c6-ee11-e09a-7a87-0b6e6bfd6a94}">
+        <p14:section name="Passo 2: un'identità" id="{a3312e9e-bffb-73e7-ea30-59caa0bf16e1}">
           <p14:sldIdLst>
             <p14:sldId id="260"/>
             <p14:sldId id="261"/>
           </p14:sldIdLst>
         </p14:section>
-        <p14:section name="Passo 3: la cartuccia porta con sé i documenti" id="{e43036da-0007-9e10-2d4e-1235d887ba8d}">
+        <p14:section name="Passo 3: la cartuccia porta con sé i documenti" id="{50a656b9-dce7-25b3-61db-9c87f95d57ec}">
           <p14:sldIdLst>
             <p14:sldId id="262"/>
             <p14:sldId id="263"/>
           </p14:sldIdLst>
         </p14:section>
-        <p14:section name="Passo 4: il bundle" id="{b6287d0d-6dbc-a3f2-d630-24e216e3810b}">
+        <p14:section name="Passo 4: il bundle" id="{9bc6335a-a3b0-ff0c-87aa-1e6c6f85e48b}">
           <p14:sldIdLst>
             <p14:sldId id="264"/>
             <p14:sldId id="265"/>
           </p14:sldIdLst>
         </p14:section>
-        <p14:section name="Passo 5: la pubblicazione" id="{f6d07e97-6e66-de17-eb88-1c99a3b97779}">
+        <p14:section name="Passo 5: la pubblicazione" id="{96c1194d-7a42-5d28-b73d-de746608dccf}">
           <p14:sldIdLst>
             <p14:sldId id="266"/>
           </p14:sldIdLst>
         </p14:section>
-        <p14:section name="Eseguire e provare" id="{f0ff681b-343e-f8be-9349-f69466963019}">
+        <p14:section name="Eseguire e provare" id="{55b6c99e-898c-d812-0e11-97ae54945a9b}">
           <p14:sldIdLst>
             <p14:sldId id="267"/>
             <p14:sldId id="268"/>
@@ -167,7 +167,7 @@
             <p14:sldId id="271"/>
           </p14:sldIdLst>
         </p14:section>
-        <p14:section name="Esercizi" id="{00a5bb8c-461d-3e27-78eb-c5fdabbcb5bc}">
+        <p14:section name="Esercizi" id="{76328922-0084-ab02-2605-02fc89261fef}">
           <p14:sldIdLst>
             <p14:sldId id="272"/>
           </p14:sldIdLst>
